--- a/docs/ir/STS_IR_revised.pptx
+++ b/docs/ir/STS_IR_revised.pptx
@@ -17352,7 +17352,7 @@
                 <a:ea typeface="Pretendard" pitchFamily="34" charset="-122"/>
                 <a:cs typeface="Pretendard" pitchFamily="34" charset="-120"/>
               </a:rPr>
-              <a:t>더 많은 콘텐츠 (상품 연결)</a:t>
+              <a:t>더 많은 상품 연결 콘텐츠</a:t>
             </a:r>
             <a:endParaRPr lang="en-US" sz="600" dirty="0"/>
           </a:p>
@@ -17680,7 +17680,7 @@
                 <a:ea typeface="Pretendard" pitchFamily="34" charset="-122"/>
                 <a:cs typeface="Pretendard" pitchFamily="34" charset="-120"/>
               </a:rPr>
-              <a:t>관련성 높은 상품으로 클릭 증가</a:t>
+              <a:t>관련성 높은 상품, 클릭 증가</a:t>
             </a:r>
             <a:endParaRPr lang="en-US" sz="600" dirty="0"/>
           </a:p>
@@ -18008,7 +18008,7 @@
                 <a:ea typeface="Pretendard" pitchFamily="34" charset="-122"/>
                 <a:cs typeface="Pretendard" pitchFamily="34" charset="-120"/>
               </a:rPr>
-              <a:t>더 많은 브랜드가 참여 (협찬·캠페인)</a:t>
+              <a:t>더 많은 브랜드가 참여</a:t>
             </a:r>
             <a:endParaRPr lang="en-US" sz="600" dirty="0"/>
           </a:p>
@@ -18172,7 +18172,7 @@
                 <a:ea typeface="Pretendard" pitchFamily="34" charset="-122"/>
                 <a:cs typeface="Pretendard" pitchFamily="34" charset="-120"/>
               </a:rPr>
-              <a:t>더 정확한 매칭으로 전환율 상승</a:t>
+              <a:t>더 정확한 매칭, 전환율 상승</a:t>
             </a:r>
             <a:endParaRPr lang="en-US" sz="600" dirty="0"/>
           </a:p>

--- a/docs/ir/STS_IR_revised.pptx
+++ b/docs/ir/STS_IR_revised.pptx
@@ -2231,13 +2231,172 @@
       </p:sp>
       <p:sp>
         <p:nvSpPr>
-          <p:cNvPr id="6" name="Text 4"/>
-          <p:cNvSpPr txBox="1"/>
-          <p:nvPr/>
-        </p:nvSpPr>
-        <p:spPr>
-          <a:xfrm>
-            <a:off x="731520" y="5852160"/>
+          <p:cNvPr id="6" name="Shape 4"/>
+          <p:cNvSpPr/>
+          <p:nvPr/>
+        </p:nvSpPr>
+        <p:spPr>
+          <a:xfrm>
+            <a:off x="731520" y="5166360"/>
+            <a:ext cx="3566160" cy="384048"/>
+          </a:xfrm>
+          <a:prstGeom prst="roundRect">
+            <a:avLst>
+              <a:gd name="adj" fmla="val 50000"/>
+            </a:avLst>
+          </a:prstGeom>
+          <a:solidFill>
+            <a:srgbClr val="FF2D78"/>
+          </a:solidFill>
+          <a:ln w="12700">
+            <a:solidFill>
+              <a:srgbClr val="FF2D78"/>
+            </a:solidFill>
+            <a:prstDash val="solid"/>
+          </a:ln>
+        </p:spPr>
+      </p:sp>
+      <p:pic>
+        <p:nvPicPr>
+          <p:cNvPr id="7" name="Image 0" descr="preencoded.png">    </p:cNvPr>
+          <p:cNvPicPr>
+            <a:picLocks noChangeAspect="1"/>
+          </p:cNvPicPr>
+          <p:nvPr/>
+        </p:nvPicPr>
+        <p:blipFill>
+          <a:blip r:embed="rId1"/>
+          <a:stretch>
+            <a:fillRect/>
+          </a:stretch>
+        </p:blipFill>
+        <p:spPr>
+          <a:xfrm>
+            <a:off x="877824" y="5266944"/>
+            <a:ext cx="182880" cy="182880"/>
+          </a:xfrm>
+          <a:prstGeom prst="rect">
+            <a:avLst/>
+          </a:prstGeom>
+        </p:spPr>
+      </p:pic>
+      <p:sp>
+        <p:nvSpPr>
+          <p:cNvPr id="8" name="Text 5">
+            <a:hlinkClick r:id="rIdundefined" tooltip=""/>
+          </p:cNvPr>
+          <p:cNvSpPr txBox="1"/>
+          <p:nvPr/>
+        </p:nvSpPr>
+        <p:spPr>
+          <a:xfrm>
+            <a:off x="1143000" y="5166360"/>
+            <a:ext cx="3017520" cy="384048"/>
+          </a:xfrm>
+          <a:prstGeom prst="rect">
+            <a:avLst/>
+          </a:prstGeom>
+          <a:noFill/>
+          <a:ln/>
+        </p:spPr>
+        <p:txBody>
+          <a:bodyPr wrap="square" lIns="0" tIns="0" rIns="0" bIns="0" rtlCol="0" anchor="ctr"/>
+          <a:lstStyle/>
+          <a:p>
+            <a:pPr indent="0" marL="0">
+              <a:buNone/>
+            </a:pPr>
+            <a:r>
+              <a:rPr lang="en-US" sz="850" b="1" u="sng" dirty="0">
+                <a:solidFill>
+                  <a:srgbClr val="FFFFFF"/>
+                </a:solidFill>
+                <a:latin typeface="Pretendard" pitchFamily="34" charset="0"/>
+                <a:ea typeface="Pretendard" pitchFamily="34" charset="-122"/>
+                <a:cs typeface="Pretendard" pitchFamily="34" charset="-120"/>
+                <a:hlinkClick r:id="rIdundefined" invalidUrl="" action="" tgtFrame="" tooltip="" history="1" highlightClick="0" endSnd="0">
+                  <a:extLst>
+                    <a:ext uri="{A12FA001-AC4F-418D-AE19-62706E023703}">
+                      <ahyp:hlinkClr xmlns:ahyp="http://schemas.microsoft.com/office/drawing/2018/hyperlinkcolor" val="tx"/>
+                    </a:ext>
+                  </a:extLst>
+                </a:hlinkClick>
+              </a:rPr>
+              <a:t>데모 바로 보기  </a:t>
+            </a:r>
+            <a:pPr indent="0" marL="0">
+              <a:buNone/>
+            </a:pPr>
+            <a:r>
+              <a:rPr lang="en-US" sz="850" u="sng" dirty="0">
+                <a:solidFill>
+                  <a:srgbClr val="FFFFFF"/>
+                </a:solidFill>
+                <a:latin typeface="Pretendard" pitchFamily="34" charset="0"/>
+                <a:ea typeface="Pretendard" pitchFamily="34" charset="-122"/>
+                <a:cs typeface="Pretendard" pitchFamily="34" charset="-120"/>
+                <a:hlinkClick r:id="rIdundefined" invalidUrl="" action="" tgtFrame="" tooltip="" history="1" highlightClick="0" endSnd="0">
+                  <a:extLst>
+                    <a:ext uri="{A12FA001-AC4F-418D-AE19-62706E023703}">
+                      <ahyp:hlinkClr xmlns:ahyp="http://schemas.microsoft.com/office/drawing/2018/hyperlinkcolor" val="tx"/>
+                    </a:ext>
+                  </a:extLst>
+                </a:hlinkClick>
+              </a:rPr>
+              <a:t>sts-mongben.vercel.app</a:t>
+            </a:r>
+            <a:endParaRPr lang="en-US" sz="850" dirty="0"/>
+          </a:p>
+        </p:txBody>
+      </p:sp>
+      <p:sp>
+        <p:nvSpPr>
+          <p:cNvPr id="9" name="Text 6"/>
+          <p:cNvSpPr txBox="1"/>
+          <p:nvPr/>
+        </p:nvSpPr>
+        <p:spPr>
+          <a:xfrm>
+            <a:off x="731520" y="5632704"/>
+            <a:ext cx="4572000" cy="182880"/>
+          </a:xfrm>
+          <a:prstGeom prst="rect">
+            <a:avLst/>
+          </a:prstGeom>
+          <a:noFill/>
+          <a:ln/>
+        </p:spPr>
+        <p:txBody>
+          <a:bodyPr wrap="square" lIns="0" tIns="0" rIns="0" bIns="0" rtlCol="0" anchor="t"/>
+          <a:lstStyle/>
+          <a:p>
+            <a:pPr indent="0" marL="0">
+              <a:buNone/>
+            </a:pPr>
+            <a:r>
+              <a:rPr lang="en-US" sz="800" dirty="0">
+                <a:solidFill>
+                  <a:srgbClr val="A0A0A8"/>
+                </a:solidFill>
+                <a:latin typeface="Pretendard" pitchFamily="34" charset="0"/>
+                <a:ea typeface="Pretendard" pitchFamily="34" charset="-122"/>
+                <a:cs typeface="Pretendard" pitchFamily="34" charset="-120"/>
+              </a:rPr>
+              <a:t>실제 동작하는 웹 데모에서 태그와 구매 연결을 직접 눌러 볼 수 있습니다.</a:t>
+            </a:r>
+            <a:endParaRPr lang="en-US" sz="800" dirty="0"/>
+          </a:p>
+        </p:txBody>
+      </p:sp>
+      <p:sp>
+        <p:nvSpPr>
+          <p:cNvPr id="10" name="Text 7"/>
+          <p:cNvSpPr txBox="1"/>
+          <p:nvPr/>
+        </p:nvSpPr>
+        <p:spPr>
+          <a:xfrm>
+            <a:off x="731520" y="5943600"/>
             <a:ext cx="3657600" cy="182880"/>
           </a:xfrm>
           <a:prstGeom prst="rect">
@@ -2270,7 +2429,7 @@
       </p:sp>
       <p:sp>
         <p:nvSpPr>
-          <p:cNvPr id="7" name="Shape 5"/>
+          <p:cNvPr id="11" name="Shape 8"/>
           <p:cNvSpPr/>
           <p:nvPr/>
         </p:nvSpPr>
@@ -2297,14 +2456,14 @@
       </p:sp>
       <p:pic>
         <p:nvPicPr>
-          <p:cNvPr id="8" name="Image 0" descr="img/hero_tag.png">    </p:cNvPr>
+          <p:cNvPr id="12" name="Image 1" descr="img/hero_tag.png">    </p:cNvPr>
           <p:cNvPicPr>
             <a:picLocks noChangeAspect="1"/>
           </p:cNvPicPr>
           <p:nvPr/>
         </p:nvPicPr>
         <p:blipFill>
-          <a:blip r:embed="rId1"/>
+          <a:blip r:embed="rId2"/>
           <a:stretch>
             <a:fillRect/>
           </a:stretch>
@@ -2321,7 +2480,7 @@
       </p:pic>
       <p:sp>
         <p:nvSpPr>
-          <p:cNvPr id="9" name="Text 6"/>
+          <p:cNvPr id="13" name="Text 9"/>
           <p:cNvSpPr txBox="1"/>
           <p:nvPr/>
         </p:nvSpPr>
@@ -2360,7 +2519,7 @@
       </p:sp>
       <p:sp>
         <p:nvSpPr>
-          <p:cNvPr id="10" name="Shape 7"/>
+          <p:cNvPr id="14" name="Shape 10"/>
           <p:cNvSpPr/>
           <p:nvPr/>
         </p:nvSpPr>
@@ -2383,7 +2542,7 @@
       </p:sp>
       <p:sp>
         <p:nvSpPr>
-          <p:cNvPr id="11" name="Shape 8"/>
+          <p:cNvPr id="15" name="Shape 11"/>
           <p:cNvSpPr/>
           <p:nvPr/>
         </p:nvSpPr>
@@ -2417,14 +2576,14 @@
       </p:sp>
       <p:pic>
         <p:nvPicPr>
-          <p:cNvPr id="12" name="Image 1" descr="img/thumb_shirt.png">    </p:cNvPr>
+          <p:cNvPr id="16" name="Image 2" descr="img/thumb_shirt.png">    </p:cNvPr>
           <p:cNvPicPr>
             <a:picLocks noChangeAspect="1"/>
           </p:cNvPicPr>
           <p:nvPr/>
         </p:nvPicPr>
         <p:blipFill>
-          <a:blip r:embed="rId2"/>
+          <a:blip r:embed="rId3"/>
           <a:stretch>
             <a:fillRect/>
           </a:stretch>
@@ -2441,7 +2600,7 @@
       </p:pic>
       <p:sp>
         <p:nvSpPr>
-          <p:cNvPr id="13" name="Text 9"/>
+          <p:cNvPr id="17" name="Text 12"/>
           <p:cNvSpPr txBox="1"/>
           <p:nvPr/>
         </p:nvSpPr>
@@ -2480,7 +2639,7 @@
       </p:sp>
       <p:sp>
         <p:nvSpPr>
-          <p:cNvPr id="14" name="Text 10"/>
+          <p:cNvPr id="18" name="Text 13"/>
           <p:cNvSpPr txBox="1"/>
           <p:nvPr/>
         </p:nvSpPr>
@@ -2519,7 +2678,7 @@
       </p:sp>
       <p:sp>
         <p:nvSpPr>
-          <p:cNvPr id="15" name="Text 11"/>
+          <p:cNvPr id="19" name="Text 14"/>
           <p:cNvSpPr txBox="1"/>
           <p:nvPr/>
         </p:nvSpPr>
@@ -2558,7 +2717,7 @@
       </p:sp>
       <p:sp>
         <p:nvSpPr>
-          <p:cNvPr id="16" name="Shape 12"/>
+          <p:cNvPr id="20" name="Shape 15"/>
           <p:cNvSpPr/>
           <p:nvPr/>
         </p:nvSpPr>
@@ -2585,7 +2744,7 @@
       </p:sp>
       <p:sp>
         <p:nvSpPr>
-          <p:cNvPr id="17" name="Text 13"/>
+          <p:cNvPr id="21" name="Text 16"/>
           <p:cNvSpPr txBox="1"/>
           <p:nvPr/>
         </p:nvSpPr>
@@ -2624,7 +2783,7 @@
       </p:sp>
       <p:sp>
         <p:nvSpPr>
-          <p:cNvPr id="18" name="Text 14"/>
+          <p:cNvPr id="22" name="Text 17"/>
           <p:cNvSpPr txBox="1"/>
           <p:nvPr/>
         </p:nvSpPr>
@@ -2663,7 +2822,7 @@
       </p:sp>
       <p:sp>
         <p:nvSpPr>
-          <p:cNvPr id="19" name="Shape 15"/>
+          <p:cNvPr id="23" name="Shape 18"/>
           <p:cNvSpPr/>
           <p:nvPr/>
         </p:nvSpPr>
@@ -2686,7 +2845,7 @@
       </p:sp>
       <p:sp>
         <p:nvSpPr>
-          <p:cNvPr id="20" name="Text 16"/>
+          <p:cNvPr id="24" name="Text 19"/>
           <p:cNvSpPr txBox="1"/>
           <p:nvPr/>
         </p:nvSpPr>
@@ -2725,7 +2884,7 @@
       </p:sp>
       <p:sp>
         <p:nvSpPr>
-          <p:cNvPr id="21" name="Text 17"/>
+          <p:cNvPr id="25" name="Text 20"/>
           <p:cNvSpPr txBox="1"/>
           <p:nvPr/>
         </p:nvSpPr>
@@ -2764,7 +2923,7 @@
       </p:sp>
       <p:sp>
         <p:nvSpPr>
-          <p:cNvPr id="22" name="Text 18"/>
+          <p:cNvPr id="26" name="Text 21"/>
           <p:cNvSpPr txBox="1"/>
           <p:nvPr/>
         </p:nvSpPr>
@@ -10304,7 +10463,7 @@
         </p:nvSpPr>
         <p:spPr>
           <a:xfrm>
-            <a:off x="548640" y="2121408"/>
+            <a:off x="548640" y="2029968"/>
             <a:ext cx="384048" cy="384048"/>
           </a:xfrm>
           <a:prstGeom prst="ellipse">
@@ -10337,7 +10496,7 @@
         </p:blipFill>
         <p:spPr>
           <a:xfrm>
-            <a:off x="644652" y="2217420"/>
+            <a:off x="644652" y="2125980"/>
             <a:ext cx="192024" cy="192024"/>
           </a:xfrm>
           <a:prstGeom prst="rect">
@@ -10353,7 +10512,7 @@
         </p:nvSpPr>
         <p:spPr>
           <a:xfrm>
-            <a:off x="1078992" y="2103120"/>
+            <a:off x="1078992" y="2011680"/>
             <a:ext cx="4681728" cy="228600"/>
           </a:xfrm>
           <a:prstGeom prst="rect">
@@ -10392,8 +10551,8 @@
         </p:nvSpPr>
         <p:spPr>
           <a:xfrm>
-            <a:off x="1078992" y="2340864"/>
-            <a:ext cx="4681728" cy="548640"/>
+            <a:off x="1078992" y="2249424"/>
+            <a:ext cx="4681728" cy="512064"/>
           </a:xfrm>
           <a:prstGeom prst="rect">
             <a:avLst/>
@@ -10434,7 +10593,7 @@
         </p:nvSpPr>
         <p:spPr>
           <a:xfrm>
-            <a:off x="548640" y="2944368"/>
+            <a:off x="548640" y="2779776"/>
             <a:ext cx="384048" cy="384048"/>
           </a:xfrm>
           <a:prstGeom prst="ellipse">
@@ -10467,7 +10626,7 @@
         </p:blipFill>
         <p:spPr>
           <a:xfrm>
-            <a:off x="644652" y="3040380"/>
+            <a:off x="644652" y="2875788"/>
             <a:ext cx="192024" cy="192024"/>
           </a:xfrm>
           <a:prstGeom prst="rect">
@@ -10483,7 +10642,7 @@
         </p:nvSpPr>
         <p:spPr>
           <a:xfrm>
-            <a:off x="1078992" y="2926080"/>
+            <a:off x="1078992" y="2761488"/>
             <a:ext cx="4681728" cy="228600"/>
           </a:xfrm>
           <a:prstGeom prst="rect">
@@ -10522,8 +10681,8 @@
         </p:nvSpPr>
         <p:spPr>
           <a:xfrm>
-            <a:off x="1078992" y="3163824"/>
-            <a:ext cx="4681728" cy="548640"/>
+            <a:off x="1078992" y="2999232"/>
+            <a:ext cx="4681728" cy="512064"/>
           </a:xfrm>
           <a:prstGeom prst="rect">
             <a:avLst/>
@@ -10564,7 +10723,7 @@
         </p:nvSpPr>
         <p:spPr>
           <a:xfrm>
-            <a:off x="548640" y="3767328"/>
+            <a:off x="548640" y="3529584"/>
             <a:ext cx="384048" cy="384048"/>
           </a:xfrm>
           <a:prstGeom prst="ellipse">
@@ -10597,7 +10756,7 @@
         </p:blipFill>
         <p:spPr>
           <a:xfrm>
-            <a:off x="644652" y="3863340"/>
+            <a:off x="644652" y="3625596"/>
             <a:ext cx="192024" cy="192024"/>
           </a:xfrm>
           <a:prstGeom prst="rect">
@@ -10613,47 +10772,47 @@
         </p:nvSpPr>
         <p:spPr>
           <a:xfrm>
+            <a:off x="1078992" y="3511296"/>
+            <a:ext cx="4681728" cy="228600"/>
+          </a:xfrm>
+          <a:prstGeom prst="rect">
+            <a:avLst/>
+          </a:prstGeom>
+          <a:noFill/>
+          <a:ln/>
+        </p:spPr>
+        <p:txBody>
+          <a:bodyPr wrap="square" lIns="0" tIns="0" rIns="0" bIns="0" rtlCol="0" anchor="t"/>
+          <a:lstStyle/>
+          <a:p>
+            <a:pPr indent="0" marL="0">
+              <a:buNone/>
+            </a:pPr>
+            <a:r>
+              <a:rPr lang="en-US" sz="1000" b="1" dirty="0">
+                <a:solidFill>
+                  <a:srgbClr val="1A1A1E"/>
+                </a:solidFill>
+                <a:latin typeface="Pretendard" pitchFamily="34" charset="0"/>
+                <a:ea typeface="Pretendard" pitchFamily="34" charset="-122"/>
+                <a:cs typeface="Pretendard" pitchFamily="34" charset="-120"/>
+              </a:rPr>
+              <a:t>3. 소형 K-뷰티 브랜드의 노출 공백</a:t>
+            </a:r>
+            <a:endParaRPr lang="en-US" sz="1000" dirty="0"/>
+          </a:p>
+        </p:txBody>
+      </p:sp>
+      <p:sp>
+        <p:nvSpPr>
+          <p:cNvPr id="21" name="Text 16"/>
+          <p:cNvSpPr txBox="1"/>
+          <p:nvPr/>
+        </p:nvSpPr>
+        <p:spPr>
+          <a:xfrm>
             <a:off x="1078992" y="3749040"/>
-            <a:ext cx="4681728" cy="228600"/>
-          </a:xfrm>
-          <a:prstGeom prst="rect">
-            <a:avLst/>
-          </a:prstGeom>
-          <a:noFill/>
-          <a:ln/>
-        </p:spPr>
-        <p:txBody>
-          <a:bodyPr wrap="square" lIns="0" tIns="0" rIns="0" bIns="0" rtlCol="0" anchor="t"/>
-          <a:lstStyle/>
-          <a:p>
-            <a:pPr indent="0" marL="0">
-              <a:buNone/>
-            </a:pPr>
-            <a:r>
-              <a:rPr lang="en-US" sz="1000" b="1" dirty="0">
-                <a:solidFill>
-                  <a:srgbClr val="1A1A1E"/>
-                </a:solidFill>
-                <a:latin typeface="Pretendard" pitchFamily="34" charset="0"/>
-                <a:ea typeface="Pretendard" pitchFamily="34" charset="-122"/>
-                <a:cs typeface="Pretendard" pitchFamily="34" charset="-120"/>
-              </a:rPr>
-              <a:t>3. 소형 K-뷰티 브랜드의 노출 공백</a:t>
-            </a:r>
-            <a:endParaRPr lang="en-US" sz="1000" dirty="0"/>
-          </a:p>
-        </p:txBody>
-      </p:sp>
-      <p:sp>
-        <p:nvSpPr>
-          <p:cNvPr id="21" name="Text 16"/>
-          <p:cNvSpPr txBox="1"/>
-          <p:nvPr/>
-        </p:nvSpPr>
-        <p:spPr>
-          <a:xfrm>
-            <a:off x="1078992" y="3986784"/>
-            <a:ext cx="4681728" cy="548640"/>
+            <a:ext cx="4681728" cy="512064"/>
           </a:xfrm>
           <a:prstGeom prst="rect">
             <a:avLst/>
@@ -10694,7 +10853,7 @@
         </p:nvSpPr>
         <p:spPr>
           <a:xfrm>
-            <a:off x="548640" y="4590288"/>
+            <a:off x="548640" y="4279392"/>
             <a:ext cx="384048" cy="384048"/>
           </a:xfrm>
           <a:prstGeom prst="ellipse">
@@ -10727,7 +10886,7 @@
         </p:blipFill>
         <p:spPr>
           <a:xfrm>
-            <a:off x="644652" y="4686300"/>
+            <a:off x="644652" y="4375404"/>
             <a:ext cx="192024" cy="192024"/>
           </a:xfrm>
           <a:prstGeom prst="rect">
@@ -10743,7 +10902,7 @@
         </p:nvSpPr>
         <p:spPr>
           <a:xfrm>
-            <a:off x="1078992" y="4572000"/>
+            <a:off x="1078992" y="4261104"/>
             <a:ext cx="4681728" cy="228600"/>
           </a:xfrm>
           <a:prstGeom prst="rect">
@@ -10782,8 +10941,8 @@
         </p:nvSpPr>
         <p:spPr>
           <a:xfrm>
-            <a:off x="1078992" y="4809744"/>
-            <a:ext cx="4681728" cy="548640"/>
+            <a:off x="1078992" y="4498848"/>
+            <a:ext cx="4681728" cy="512064"/>
           </a:xfrm>
           <a:prstGeom prst="rect">
             <a:avLst/>
@@ -10824,7 +10983,7 @@
         </p:nvSpPr>
         <p:spPr>
           <a:xfrm>
-            <a:off x="548640" y="5413248"/>
+            <a:off x="548640" y="5029200"/>
             <a:ext cx="384048" cy="384048"/>
           </a:xfrm>
           <a:prstGeom prst="ellipse">
@@ -10857,7 +11016,7 @@
         </p:blipFill>
         <p:spPr>
           <a:xfrm>
-            <a:off x="644652" y="5509260"/>
+            <a:off x="644652" y="5125212"/>
             <a:ext cx="192024" cy="192024"/>
           </a:xfrm>
           <a:prstGeom prst="rect">
@@ -10873,7 +11032,7 @@
         </p:nvSpPr>
         <p:spPr>
           <a:xfrm>
-            <a:off x="1078992" y="5394960"/>
+            <a:off x="1078992" y="5010912"/>
             <a:ext cx="4681728" cy="228600"/>
           </a:xfrm>
           <a:prstGeom prst="rect">
@@ -10912,8 +11071,8 @@
         </p:nvSpPr>
         <p:spPr>
           <a:xfrm>
-            <a:off x="1078992" y="5632704"/>
-            <a:ext cx="4681728" cy="548640"/>
+            <a:off x="1078992" y="5248656"/>
+            <a:ext cx="4681728" cy="512064"/>
           </a:xfrm>
           <a:prstGeom prst="rect">
             <a:avLst/>
@@ -10949,6 +11108,165 @@
       <p:sp>
         <p:nvSpPr>
           <p:cNvPr id="30" name="Shape 23"/>
+          <p:cNvSpPr/>
+          <p:nvPr/>
+        </p:nvSpPr>
+        <p:spPr>
+          <a:xfrm>
+            <a:off x="548640" y="5715000"/>
+            <a:ext cx="4023360" cy="384048"/>
+          </a:xfrm>
+          <a:prstGeom prst="roundRect">
+            <a:avLst>
+              <a:gd name="adj" fmla="val 50000"/>
+            </a:avLst>
+          </a:prstGeom>
+          <a:solidFill>
+            <a:srgbClr val="FFFFFF"/>
+          </a:solidFill>
+          <a:ln w="9525">
+            <a:solidFill>
+              <a:srgbClr val="FFC2D8"/>
+            </a:solidFill>
+            <a:prstDash val="solid"/>
+          </a:ln>
+        </p:spPr>
+      </p:sp>
+      <p:pic>
+        <p:nvPicPr>
+          <p:cNvPr id="31" name="Image 5" descr="preencoded.png">    </p:cNvPr>
+          <p:cNvPicPr>
+            <a:picLocks noChangeAspect="1"/>
+          </p:cNvPicPr>
+          <p:nvPr/>
+        </p:nvPicPr>
+        <p:blipFill>
+          <a:blip r:embed="rId6"/>
+          <a:stretch>
+            <a:fillRect/>
+          </a:stretch>
+        </p:blipFill>
+        <p:spPr>
+          <a:xfrm>
+            <a:off x="694944" y="5815584"/>
+            <a:ext cx="182880" cy="182880"/>
+          </a:xfrm>
+          <a:prstGeom prst="rect">
+            <a:avLst/>
+          </a:prstGeom>
+        </p:spPr>
+      </p:pic>
+      <p:sp>
+        <p:nvSpPr>
+          <p:cNvPr id="32" name="Text 24">
+            <a:hlinkClick r:id="rIdundefined" tooltip=""/>
+          </p:cNvPr>
+          <p:cNvSpPr txBox="1"/>
+          <p:nvPr/>
+        </p:nvSpPr>
+        <p:spPr>
+          <a:xfrm>
+            <a:off x="960120" y="5715000"/>
+            <a:ext cx="3474720" cy="384048"/>
+          </a:xfrm>
+          <a:prstGeom prst="rect">
+            <a:avLst/>
+          </a:prstGeom>
+          <a:noFill/>
+          <a:ln/>
+        </p:spPr>
+        <p:txBody>
+          <a:bodyPr wrap="square" lIns="0" tIns="0" rIns="0" bIns="0" rtlCol="0" anchor="ctr"/>
+          <a:lstStyle/>
+          <a:p>
+            <a:pPr indent="0" marL="0">
+              <a:buNone/>
+            </a:pPr>
+            <a:r>
+              <a:rPr lang="en-US" sz="850" b="1" u="sng" dirty="0">
+                <a:solidFill>
+                  <a:srgbClr val="FF2D78"/>
+                </a:solidFill>
+                <a:latin typeface="Pretendard" pitchFamily="34" charset="0"/>
+                <a:ea typeface="Pretendard" pitchFamily="34" charset="-122"/>
+                <a:cs typeface="Pretendard" pitchFamily="34" charset="-120"/>
+                <a:hlinkClick r:id="rIdundefined" invalidUrl="" action="" tgtFrame="" tooltip="" history="1" highlightClick="0" endSnd="0">
+                  <a:extLst>
+                    <a:ext uri="{A12FA001-AC4F-418D-AE19-62706E023703}">
+                      <ahyp:hlinkClr xmlns:ahyp="http://schemas.microsoft.com/office/drawing/2018/hyperlinkcolor" val="tx"/>
+                    </a:ext>
+                  </a:extLst>
+                </a:hlinkClick>
+              </a:rPr>
+              <a:t>데모 바로 보기  </a:t>
+            </a:r>
+            <a:pPr indent="0" marL="0">
+              <a:buNone/>
+            </a:pPr>
+            <a:r>
+              <a:rPr lang="en-US" sz="850" u="sng" dirty="0">
+                <a:solidFill>
+                  <a:srgbClr val="1A1A1E"/>
+                </a:solidFill>
+                <a:latin typeface="Pretendard" pitchFamily="34" charset="0"/>
+                <a:ea typeface="Pretendard" pitchFamily="34" charset="-122"/>
+                <a:cs typeface="Pretendard" pitchFamily="34" charset="-120"/>
+                <a:hlinkClick r:id="rIdundefined" invalidUrl="" action="" tgtFrame="" tooltip="" history="1" highlightClick="0" endSnd="0">
+                  <a:extLst>
+                    <a:ext uri="{A12FA001-AC4F-418D-AE19-62706E023703}">
+                      <ahyp:hlinkClr xmlns:ahyp="http://schemas.microsoft.com/office/drawing/2018/hyperlinkcolor" val="tx"/>
+                    </a:ext>
+                  </a:extLst>
+                </a:hlinkClick>
+              </a:rPr>
+              <a:t>sts-mongben.vercel.app</a:t>
+            </a:r>
+            <a:endParaRPr lang="en-US" sz="850" dirty="0"/>
+          </a:p>
+        </p:txBody>
+      </p:sp>
+      <p:sp>
+        <p:nvSpPr>
+          <p:cNvPr id="33" name="Text 25"/>
+          <p:cNvSpPr txBox="1"/>
+          <p:nvPr/>
+        </p:nvSpPr>
+        <p:spPr>
+          <a:xfrm>
+            <a:off x="4709160" y="5715000"/>
+            <a:ext cx="1051560" cy="384048"/>
+          </a:xfrm>
+          <a:prstGeom prst="rect">
+            <a:avLst/>
+          </a:prstGeom>
+          <a:noFill/>
+          <a:ln/>
+        </p:spPr>
+        <p:txBody>
+          <a:bodyPr wrap="square" lIns="0" tIns="0" rIns="0" bIns="0" rtlCol="0" anchor="ctr"/>
+          <a:lstStyle/>
+          <a:p>
+            <a:pPr indent="0" marL="0">
+              <a:buNone/>
+            </a:pPr>
+            <a:r>
+              <a:rPr lang="en-US" sz="750" dirty="0">
+                <a:solidFill>
+                  <a:srgbClr val="7A7A82"/>
+                </a:solidFill>
+                <a:latin typeface="Pretendard" pitchFamily="34" charset="0"/>
+                <a:ea typeface="Pretendard" pitchFamily="34" charset="-122"/>
+                <a:cs typeface="Pretendard" pitchFamily="34" charset="-120"/>
+              </a:rPr>
+              <a:t>위 화면 흐름은 웹 데모에서 직접 눌러 볼 수 있습니다.</a:t>
+            </a:r>
+            <a:endParaRPr lang="en-US" sz="750" dirty="0"/>
+          </a:p>
+        </p:txBody>
+      </p:sp>
+      <p:sp>
+        <p:nvSpPr>
+          <p:cNvPr id="34" name="Shape 26"/>
           <p:cNvSpPr/>
           <p:nvPr/>
         </p:nvSpPr>
@@ -10975,13 +11293,13 @@
       </p:sp>
       <p:sp>
         <p:nvSpPr>
-          <p:cNvPr id="31" name="Text 24"/>
-          <p:cNvSpPr txBox="1"/>
-          <p:nvPr/>
-        </p:nvSpPr>
-        <p:spPr>
-          <a:xfrm>
-            <a:off x="6309360" y="2286000"/>
+          <p:cNvPr id="35" name="Text 27"/>
+          <p:cNvSpPr txBox="1"/>
+          <p:nvPr/>
+        </p:nvSpPr>
+        <p:spPr>
+          <a:xfrm>
+            <a:off x="6309360" y="2304288"/>
             <a:ext cx="5102352" cy="182880"/>
           </a:xfrm>
           <a:prstGeom prst="rect">
@@ -11006,668 +11324,36 @@
                 <a:ea typeface="Pretendard" pitchFamily="34" charset="-122"/>
                 <a:cs typeface="Pretendard" pitchFamily="34" charset="-120"/>
               </a:rPr>
-              <a:t>STS BEAUTY  ·  Reveal the Process</a:t>
+              <a:t>STS BEAUTY  ·  동남아 K-뷰티 적용 화면 예시</a:t>
             </a:r>
             <a:endParaRPr lang="en-US" sz="750" dirty="0"/>
           </a:p>
         </p:txBody>
       </p:sp>
-      <p:sp>
-        <p:nvSpPr>
-          <p:cNvPr id="32" name="Text 25"/>
-          <p:cNvSpPr txBox="1"/>
-          <p:nvPr/>
-        </p:nvSpPr>
-        <p:spPr>
-          <a:xfrm>
-            <a:off x="6309360" y="2487168"/>
-            <a:ext cx="5102352" cy="274320"/>
-          </a:xfrm>
-          <a:prstGeom prst="rect">
-            <a:avLst/>
-          </a:prstGeom>
-          <a:noFill/>
-          <a:ln/>
-        </p:spPr>
-        <p:txBody>
-          <a:bodyPr wrap="square" lIns="0" tIns="0" rIns="0" bIns="0" rtlCol="0" anchor="t"/>
-          <a:lstStyle/>
-          <a:p>
-            <a:pPr indent="0" marL="0">
-              <a:buNone/>
-            </a:pPr>
-            <a:r>
-              <a:rPr lang="en-US" sz="800" dirty="0">
-                <a:solidFill>
-                  <a:srgbClr val="7A7A82"/>
-                </a:solidFill>
-                <a:latin typeface="Pretendard" pitchFamily="34" charset="0"/>
-                <a:ea typeface="Pretendard" pitchFamily="34" charset="-122"/>
-                <a:cs typeface="Pretendard" pitchFamily="34" charset="-120"/>
-              </a:rPr>
-              <a:t>완성된 룩에서 궁금한 부위를 터치하면 실제 사용 과정과 제품을 확인하고 바로 구매할 수 있어요.</a:t>
-            </a:r>
-            <a:endParaRPr lang="en-US" sz="800" dirty="0"/>
-          </a:p>
-        </p:txBody>
-      </p:sp>
-      <p:sp>
-        <p:nvSpPr>
-          <p:cNvPr id="33" name="Shape 26"/>
-          <p:cNvSpPr/>
-          <p:nvPr/>
-        </p:nvSpPr>
-        <p:spPr>
-          <a:xfrm>
-            <a:off x="7063740" y="2834640"/>
-            <a:ext cx="3593592" cy="2395728"/>
-          </a:xfrm>
-          <a:prstGeom prst="roundRect">
-            <a:avLst>
-              <a:gd name="adj" fmla="val 3053"/>
-            </a:avLst>
-          </a:prstGeom>
-          <a:solidFill>
-            <a:srgbClr val="F6F6F7"/>
-          </a:solidFill>
-          <a:ln w="9525">
-            <a:solidFill>
-              <a:srgbClr val="E4E4E8"/>
-            </a:solidFill>
-            <a:prstDash val="dash"/>
-          </a:ln>
-        </p:spPr>
-      </p:sp>
-      <p:sp>
-        <p:nvSpPr>
-          <p:cNvPr id="34" name="Text 27"/>
-          <p:cNvSpPr txBox="1"/>
-          <p:nvPr/>
-        </p:nvSpPr>
-        <p:spPr>
-          <a:xfrm>
-            <a:off x="7063740" y="2834640"/>
-            <a:ext cx="3593592" cy="2395728"/>
-          </a:xfrm>
-          <a:prstGeom prst="rect">
-            <a:avLst/>
-          </a:prstGeom>
-          <a:noFill/>
-          <a:ln/>
-        </p:spPr>
-        <p:txBody>
-          <a:bodyPr wrap="square" lIns="0" tIns="0" rIns="0" bIns="0" rtlCol="0" anchor="ctr"/>
-          <a:lstStyle/>
-          <a:p>
-            <a:pPr algn="ctr" indent="0" marL="0">
-              <a:lnSpc>
-                <a:spcPct val="140000"/>
-              </a:lnSpc>
-              <a:buNone/>
-            </a:pPr>
-            <a:r>
-              <a:rPr lang="en-US" sz="800" dirty="0">
-                <a:solidFill>
-                  <a:srgbClr val="A0A0A8"/>
-                </a:solidFill>
-                <a:latin typeface="Pretendard" pitchFamily="34" charset="0"/>
-                <a:ea typeface="Pretendard" pitchFamily="34" charset="-122"/>
-                <a:cs typeface="Pretendard" pitchFamily="34" charset="-120"/>
-              </a:rPr>
-              <a:t>STS BEAUTY 화면 예시 이미지</a:t>
-            </a:r>
-            <a:endParaRPr lang="en-US" sz="800" dirty="0"/>
-          </a:p>
-          <a:p>
-            <a:pPr algn="ctr" indent="0" marL="0">
-              <a:lnSpc>
-                <a:spcPct val="140000"/>
-              </a:lnSpc>
-              <a:buNone/>
-            </a:pPr>
-            <a:r>
-              <a:rPr lang="en-US" sz="800" dirty="0">
-                <a:solidFill>
-                  <a:srgbClr val="A0A0A8"/>
-                </a:solidFill>
-                <a:latin typeface="Pretendard" pitchFamily="34" charset="0"/>
-                <a:ea typeface="Pretendard" pitchFamily="34" charset="-122"/>
-                <a:cs typeface="Pretendard" pitchFamily="34" charset="-120"/>
-              </a:rPr>
-              <a:t>(이미지 파일 전달 시 이 자리에 삽입)</a:t>
-            </a:r>
-            <a:endParaRPr lang="en-US" sz="800" dirty="0"/>
-          </a:p>
-        </p:txBody>
-      </p:sp>
-      <p:sp>
-        <p:nvSpPr>
-          <p:cNvPr id="35" name="Shape 28"/>
-          <p:cNvSpPr/>
-          <p:nvPr/>
-        </p:nvSpPr>
-        <p:spPr>
-          <a:xfrm>
-            <a:off x="7063740" y="5367528"/>
-            <a:ext cx="829818" cy="237744"/>
-          </a:xfrm>
-          <a:prstGeom prst="roundRect">
-            <a:avLst>
-              <a:gd name="adj" fmla="val 50000"/>
-            </a:avLst>
-          </a:prstGeom>
-          <a:solidFill>
-            <a:srgbClr val="EEEEF1"/>
-          </a:solidFill>
-          <a:ln w="12700">
-            <a:solidFill>
-              <a:srgbClr val="EEEEF1"/>
-            </a:solidFill>
-            <a:prstDash val="solid"/>
-          </a:ln>
-        </p:spPr>
-      </p:sp>
-      <p:sp>
-        <p:nvSpPr>
-          <p:cNvPr id="36" name="Text 29"/>
-          <p:cNvSpPr txBox="1"/>
-          <p:nvPr/>
-        </p:nvSpPr>
-        <p:spPr>
-          <a:xfrm>
-            <a:off x="7063740" y="5367528"/>
-            <a:ext cx="829818" cy="237744"/>
-          </a:xfrm>
-          <a:prstGeom prst="rect">
-            <a:avLst/>
-          </a:prstGeom>
-          <a:noFill/>
-          <a:ln/>
-        </p:spPr>
-        <p:txBody>
-          <a:bodyPr wrap="square" lIns="0" tIns="0" rIns="0" bIns="0" rtlCol="0" anchor="ctr"/>
-          <a:lstStyle/>
-          <a:p>
-            <a:pPr algn="ctr" indent="0" marL="0">
-              <a:buNone/>
-            </a:pPr>
-            <a:r>
-              <a:rPr lang="en-US" sz="650" b="1" dirty="0">
-                <a:solidFill>
-                  <a:srgbClr val="3A3A42"/>
-                </a:solidFill>
-                <a:latin typeface="Pretendard" pitchFamily="34" charset="0"/>
-                <a:ea typeface="Pretendard" pitchFamily="34" charset="-122"/>
-                <a:cs typeface="Pretendard" pitchFamily="34" charset="-120"/>
-              </a:rPr>
-              <a:t>1. 피드 · 완성된 룩</a:t>
-            </a:r>
-            <a:endParaRPr lang="en-US" sz="650" dirty="0"/>
-          </a:p>
-        </p:txBody>
-      </p:sp>
-      <p:sp>
-        <p:nvSpPr>
-          <p:cNvPr id="37" name="Shape 30"/>
-          <p:cNvSpPr/>
-          <p:nvPr/>
-        </p:nvSpPr>
-        <p:spPr>
-          <a:xfrm>
-            <a:off x="7984998" y="5367528"/>
-            <a:ext cx="829818" cy="237744"/>
-          </a:xfrm>
-          <a:prstGeom prst="roundRect">
-            <a:avLst>
-              <a:gd name="adj" fmla="val 50000"/>
-            </a:avLst>
-          </a:prstGeom>
-          <a:solidFill>
-            <a:srgbClr val="EEEEF1"/>
-          </a:solidFill>
-          <a:ln w="12700">
-            <a:solidFill>
-              <a:srgbClr val="EEEEF1"/>
-            </a:solidFill>
-            <a:prstDash val="solid"/>
-          </a:ln>
-        </p:spPr>
-      </p:sp>
-      <p:sp>
-        <p:nvSpPr>
-          <p:cNvPr id="38" name="Text 31"/>
-          <p:cNvSpPr txBox="1"/>
-          <p:nvPr/>
-        </p:nvSpPr>
-        <p:spPr>
-          <a:xfrm>
-            <a:off x="7984998" y="5367528"/>
-            <a:ext cx="829818" cy="237744"/>
-          </a:xfrm>
-          <a:prstGeom prst="rect">
-            <a:avLst/>
-          </a:prstGeom>
-          <a:noFill/>
-          <a:ln/>
-        </p:spPr>
-        <p:txBody>
-          <a:bodyPr wrap="square" lIns="0" tIns="0" rIns="0" bIns="0" rtlCol="0" anchor="ctr"/>
-          <a:lstStyle/>
-          <a:p>
-            <a:pPr algn="ctr" indent="0" marL="0">
-              <a:buNone/>
-            </a:pPr>
-            <a:r>
-              <a:rPr lang="en-US" sz="650" b="1" dirty="0">
-                <a:solidFill>
-                  <a:srgbClr val="3A3A42"/>
-                </a:solidFill>
-                <a:latin typeface="Pretendard" pitchFamily="34" charset="0"/>
-                <a:ea typeface="Pretendard" pitchFamily="34" charset="-122"/>
-                <a:cs typeface="Pretendard" pitchFamily="34" charset="-120"/>
-              </a:rPr>
-              <a:t>2. 부위 터치 · 과정 공개</a:t>
-            </a:r>
-            <a:endParaRPr lang="en-US" sz="650" dirty="0"/>
-          </a:p>
-        </p:txBody>
-      </p:sp>
-      <p:sp>
-        <p:nvSpPr>
-          <p:cNvPr id="39" name="Shape 32"/>
-          <p:cNvSpPr/>
-          <p:nvPr/>
-        </p:nvSpPr>
-        <p:spPr>
-          <a:xfrm>
-            <a:off x="8906256" y="5367528"/>
-            <a:ext cx="829818" cy="237744"/>
-          </a:xfrm>
-          <a:prstGeom prst="roundRect">
-            <a:avLst>
-              <a:gd name="adj" fmla="val 50000"/>
-            </a:avLst>
-          </a:prstGeom>
-          <a:solidFill>
-            <a:srgbClr val="EEEEF1"/>
-          </a:solidFill>
-          <a:ln w="12700">
-            <a:solidFill>
-              <a:srgbClr val="EEEEF1"/>
-            </a:solidFill>
-            <a:prstDash val="solid"/>
-          </a:ln>
-        </p:spPr>
-      </p:sp>
-      <p:sp>
-        <p:nvSpPr>
-          <p:cNvPr id="40" name="Text 33"/>
-          <p:cNvSpPr txBox="1"/>
-          <p:nvPr/>
-        </p:nvSpPr>
-        <p:spPr>
-          <a:xfrm>
-            <a:off x="8906256" y="5367528"/>
-            <a:ext cx="829818" cy="237744"/>
-          </a:xfrm>
-          <a:prstGeom prst="rect">
-            <a:avLst/>
-          </a:prstGeom>
-          <a:noFill/>
-          <a:ln/>
-        </p:spPr>
-        <p:txBody>
-          <a:bodyPr wrap="square" lIns="0" tIns="0" rIns="0" bIns="0" rtlCol="0" anchor="ctr"/>
-          <a:lstStyle/>
-          <a:p>
-            <a:pPr algn="ctr" indent="0" marL="0">
-              <a:buNone/>
-            </a:pPr>
-            <a:r>
-              <a:rPr lang="en-US" sz="650" b="1" dirty="0">
-                <a:solidFill>
-                  <a:srgbClr val="3A3A42"/>
-                </a:solidFill>
-                <a:latin typeface="Pretendard" pitchFamily="34" charset="0"/>
-                <a:ea typeface="Pretendard" pitchFamily="34" charset="-122"/>
-                <a:cs typeface="Pretendard" pitchFamily="34" charset="-120"/>
-              </a:rPr>
-              <a:t>3. 타임라인 · 과정 선택</a:t>
-            </a:r>
-            <a:endParaRPr lang="en-US" sz="650" dirty="0"/>
-          </a:p>
-        </p:txBody>
-      </p:sp>
-      <p:sp>
-        <p:nvSpPr>
-          <p:cNvPr id="41" name="Shape 34"/>
-          <p:cNvSpPr/>
-          <p:nvPr/>
-        </p:nvSpPr>
-        <p:spPr>
-          <a:xfrm>
-            <a:off x="9827514" y="5367528"/>
-            <a:ext cx="829818" cy="237744"/>
-          </a:xfrm>
-          <a:prstGeom prst="roundRect">
-            <a:avLst>
-              <a:gd name="adj" fmla="val 50000"/>
-            </a:avLst>
-          </a:prstGeom>
-          <a:solidFill>
-            <a:srgbClr val="EEEEF1"/>
-          </a:solidFill>
-          <a:ln w="12700">
-            <a:solidFill>
-              <a:srgbClr val="EEEEF1"/>
-            </a:solidFill>
-            <a:prstDash val="solid"/>
-          </a:ln>
-        </p:spPr>
-      </p:sp>
-      <p:sp>
-        <p:nvSpPr>
-          <p:cNvPr id="42" name="Text 35"/>
-          <p:cNvSpPr txBox="1"/>
-          <p:nvPr/>
-        </p:nvSpPr>
-        <p:spPr>
-          <a:xfrm>
-            <a:off x="9827514" y="5367528"/>
-            <a:ext cx="829818" cy="237744"/>
-          </a:xfrm>
-          <a:prstGeom prst="rect">
-            <a:avLst/>
-          </a:prstGeom>
-          <a:noFill/>
-          <a:ln/>
-        </p:spPr>
-        <p:txBody>
-          <a:bodyPr wrap="square" lIns="0" tIns="0" rIns="0" bIns="0" rtlCol="0" anchor="ctr"/>
-          <a:lstStyle/>
-          <a:p>
-            <a:pPr algn="ctr" indent="0" marL="0">
-              <a:buNone/>
-            </a:pPr>
-            <a:r>
-              <a:rPr lang="en-US" sz="650" b="1" dirty="0">
-                <a:solidFill>
-                  <a:srgbClr val="3A3A42"/>
-                </a:solidFill>
-                <a:latin typeface="Pretendard" pitchFamily="34" charset="0"/>
-                <a:ea typeface="Pretendard" pitchFamily="34" charset="-122"/>
-                <a:cs typeface="Pretendard" pitchFamily="34" charset="-120"/>
-              </a:rPr>
-              <a:t>4. 과정 시청 + 제품 정보</a:t>
-            </a:r>
-            <a:endParaRPr lang="en-US" sz="650" dirty="0"/>
-          </a:p>
-        </p:txBody>
-      </p:sp>
-      <p:sp>
-        <p:nvSpPr>
-          <p:cNvPr id="43" name="Shape 36"/>
-          <p:cNvSpPr/>
-          <p:nvPr/>
-        </p:nvSpPr>
-        <p:spPr>
-          <a:xfrm>
-            <a:off x="7063740" y="5678424"/>
-            <a:ext cx="829818" cy="237744"/>
-          </a:xfrm>
-          <a:prstGeom prst="roundRect">
-            <a:avLst>
-              <a:gd name="adj" fmla="val 50000"/>
-            </a:avLst>
-          </a:prstGeom>
-          <a:solidFill>
-            <a:srgbClr val="FFEAF2"/>
-          </a:solidFill>
-          <a:ln w="12700">
-            <a:solidFill>
-              <a:srgbClr val="FFEAF2"/>
-            </a:solidFill>
-            <a:prstDash val="solid"/>
-          </a:ln>
-        </p:spPr>
-      </p:sp>
-      <p:sp>
-        <p:nvSpPr>
-          <p:cNvPr id="44" name="Text 37"/>
-          <p:cNvSpPr txBox="1"/>
-          <p:nvPr/>
-        </p:nvSpPr>
-        <p:spPr>
-          <a:xfrm>
-            <a:off x="7063740" y="5678424"/>
-            <a:ext cx="829818" cy="237744"/>
-          </a:xfrm>
-          <a:prstGeom prst="rect">
-            <a:avLst/>
-          </a:prstGeom>
-          <a:noFill/>
-          <a:ln/>
-        </p:spPr>
-        <p:txBody>
-          <a:bodyPr wrap="square" lIns="0" tIns="0" rIns="0" bIns="0" rtlCol="0" anchor="ctr"/>
-          <a:lstStyle/>
-          <a:p>
-            <a:pPr algn="ctr" indent="0" marL="0">
-              <a:buNone/>
-            </a:pPr>
-            <a:r>
-              <a:rPr lang="en-US" sz="650" b="1" dirty="0">
-                <a:solidFill>
-                  <a:srgbClr val="FF2D78"/>
-                </a:solidFill>
-                <a:latin typeface="Pretendard" pitchFamily="34" charset="0"/>
-                <a:ea typeface="Pretendard" pitchFamily="34" charset="-122"/>
-                <a:cs typeface="Pretendard" pitchFamily="34" charset="-120"/>
-              </a:rPr>
-              <a:t>5. 전체 제품 보기</a:t>
-            </a:r>
-            <a:endParaRPr lang="en-US" sz="650" dirty="0"/>
-          </a:p>
-        </p:txBody>
-      </p:sp>
-      <p:sp>
-        <p:nvSpPr>
-          <p:cNvPr id="45" name="Shape 38"/>
-          <p:cNvSpPr/>
-          <p:nvPr/>
-        </p:nvSpPr>
-        <p:spPr>
-          <a:xfrm>
-            <a:off x="7984998" y="5678424"/>
-            <a:ext cx="829818" cy="237744"/>
-          </a:xfrm>
-          <a:prstGeom prst="roundRect">
-            <a:avLst>
-              <a:gd name="adj" fmla="val 50000"/>
-            </a:avLst>
-          </a:prstGeom>
-          <a:solidFill>
-            <a:srgbClr val="FFEAF2"/>
-          </a:solidFill>
-          <a:ln w="12700">
-            <a:solidFill>
-              <a:srgbClr val="FFEAF2"/>
-            </a:solidFill>
-            <a:prstDash val="solid"/>
-          </a:ln>
-        </p:spPr>
-      </p:sp>
-      <p:sp>
-        <p:nvSpPr>
-          <p:cNvPr id="46" name="Text 39"/>
-          <p:cNvSpPr txBox="1"/>
-          <p:nvPr/>
-        </p:nvSpPr>
-        <p:spPr>
-          <a:xfrm>
-            <a:off x="7984998" y="5678424"/>
-            <a:ext cx="829818" cy="237744"/>
-          </a:xfrm>
-          <a:prstGeom prst="rect">
-            <a:avLst/>
-          </a:prstGeom>
-          <a:noFill/>
-          <a:ln/>
-        </p:spPr>
-        <p:txBody>
-          <a:bodyPr wrap="square" lIns="0" tIns="0" rIns="0" bIns="0" rtlCol="0" anchor="ctr"/>
-          <a:lstStyle/>
-          <a:p>
-            <a:pPr algn="ctr" indent="0" marL="0">
-              <a:buNone/>
-            </a:pPr>
-            <a:r>
-              <a:rPr lang="en-US" sz="650" b="1" dirty="0">
-                <a:solidFill>
-                  <a:srgbClr val="FF2D78"/>
-                </a:solidFill>
-                <a:latin typeface="Pretendard" pitchFamily="34" charset="0"/>
-                <a:ea typeface="Pretendard" pitchFamily="34" charset="-122"/>
-                <a:cs typeface="Pretendard" pitchFamily="34" charset="-120"/>
-              </a:rPr>
-              <a:t>6. 루틴 한번에 담기</a:t>
-            </a:r>
-            <a:endParaRPr lang="en-US" sz="650" dirty="0"/>
-          </a:p>
-        </p:txBody>
-      </p:sp>
-      <p:sp>
-        <p:nvSpPr>
-          <p:cNvPr id="47" name="Shape 40"/>
-          <p:cNvSpPr/>
-          <p:nvPr/>
-        </p:nvSpPr>
-        <p:spPr>
-          <a:xfrm>
-            <a:off x="8906256" y="5678424"/>
-            <a:ext cx="829818" cy="237744"/>
-          </a:xfrm>
-          <a:prstGeom prst="roundRect">
-            <a:avLst>
-              <a:gd name="adj" fmla="val 50000"/>
-            </a:avLst>
-          </a:prstGeom>
-          <a:solidFill>
-            <a:srgbClr val="FFEAF2"/>
-          </a:solidFill>
-          <a:ln w="12700">
-            <a:solidFill>
-              <a:srgbClr val="FFEAF2"/>
-            </a:solidFill>
-            <a:prstDash val="solid"/>
-          </a:ln>
-        </p:spPr>
-      </p:sp>
-      <p:sp>
-        <p:nvSpPr>
-          <p:cNvPr id="48" name="Text 41"/>
-          <p:cNvSpPr txBox="1"/>
-          <p:nvPr/>
-        </p:nvSpPr>
-        <p:spPr>
-          <a:xfrm>
-            <a:off x="8906256" y="5678424"/>
-            <a:ext cx="829818" cy="237744"/>
-          </a:xfrm>
-          <a:prstGeom prst="rect">
-            <a:avLst/>
-          </a:prstGeom>
-          <a:noFill/>
-          <a:ln/>
-        </p:spPr>
-        <p:txBody>
-          <a:bodyPr wrap="square" lIns="0" tIns="0" rIns="0" bIns="0" rtlCol="0" anchor="ctr"/>
-          <a:lstStyle/>
-          <a:p>
-            <a:pPr algn="ctr" indent="0" marL="0">
-              <a:buNone/>
-            </a:pPr>
-            <a:r>
-              <a:rPr lang="en-US" sz="650" b="1" dirty="0">
-                <a:solidFill>
-                  <a:srgbClr val="FF2D78"/>
-                </a:solidFill>
-                <a:latin typeface="Pretendard" pitchFamily="34" charset="0"/>
-                <a:ea typeface="Pretendard" pitchFamily="34" charset="-122"/>
-                <a:cs typeface="Pretendard" pitchFamily="34" charset="-120"/>
-              </a:rPr>
-              <a:t>7. 유사 컬러 추천</a:t>
-            </a:r>
-            <a:endParaRPr lang="en-US" sz="650" dirty="0"/>
-          </a:p>
-        </p:txBody>
-      </p:sp>
-      <p:sp>
-        <p:nvSpPr>
-          <p:cNvPr id="49" name="Shape 42"/>
-          <p:cNvSpPr/>
-          <p:nvPr/>
-        </p:nvSpPr>
-        <p:spPr>
-          <a:xfrm>
-            <a:off x="9827514" y="5678424"/>
-            <a:ext cx="829818" cy="237744"/>
-          </a:xfrm>
-          <a:prstGeom prst="roundRect">
-            <a:avLst>
-              <a:gd name="adj" fmla="val 50000"/>
-            </a:avLst>
-          </a:prstGeom>
-          <a:solidFill>
-            <a:srgbClr val="FFEAF2"/>
-          </a:solidFill>
-          <a:ln w="12700">
-            <a:solidFill>
-              <a:srgbClr val="FFEAF2"/>
-            </a:solidFill>
-            <a:prstDash val="solid"/>
-          </a:ln>
-        </p:spPr>
-      </p:sp>
-      <p:sp>
-        <p:nvSpPr>
-          <p:cNvPr id="50" name="Text 43"/>
-          <p:cNvSpPr txBox="1"/>
-          <p:nvPr/>
-        </p:nvSpPr>
-        <p:spPr>
-          <a:xfrm>
-            <a:off x="9827514" y="5678424"/>
-            <a:ext cx="829818" cy="237744"/>
-          </a:xfrm>
-          <a:prstGeom prst="rect">
-            <a:avLst/>
-          </a:prstGeom>
-          <a:noFill/>
-          <a:ln/>
-        </p:spPr>
-        <p:txBody>
-          <a:bodyPr wrap="square" lIns="0" tIns="0" rIns="0" bIns="0" rtlCol="0" anchor="ctr"/>
-          <a:lstStyle/>
-          <a:p>
-            <a:pPr algn="ctr" indent="0" marL="0">
-              <a:buNone/>
-            </a:pPr>
-            <a:r>
-              <a:rPr lang="en-US" sz="650" b="1" dirty="0">
-                <a:solidFill>
-                  <a:srgbClr val="FF2D78"/>
-                </a:solidFill>
-                <a:latin typeface="Pretendard" pitchFamily="34" charset="0"/>
-                <a:ea typeface="Pretendard" pitchFamily="34" charset="-122"/>
-                <a:cs typeface="Pretendard" pitchFamily="34" charset="-120"/>
-              </a:rPr>
-              <a:t>8. 구매 완료 · 수익 정산</a:t>
-            </a:r>
-            <a:endParaRPr lang="en-US" sz="650" dirty="0"/>
-          </a:p>
-        </p:txBody>
-      </p:sp>
+      <p:pic>
+        <p:nvPicPr>
+          <p:cNvPr id="36" name="Image 6" descr="img/sea_example.png">    </p:cNvPr>
+          <p:cNvPicPr>
+            <a:picLocks noChangeAspect="1"/>
+          </p:cNvPicPr>
+          <p:nvPr/>
+        </p:nvPicPr>
+        <p:blipFill>
+          <a:blip r:embed="rId7"/>
+          <a:stretch>
+            <a:fillRect/>
+          </a:stretch>
+        </p:blipFill>
+        <p:spPr>
+          <a:xfrm>
+            <a:off x="6323076" y="2606040"/>
+            <a:ext cx="5074920" cy="3383280"/>
+          </a:xfrm>
+          <a:prstGeom prst="rect">
+            <a:avLst/>
+          </a:prstGeom>
+        </p:spPr>
+      </p:pic>
     </p:spTree>
   </p:cSld>
   <p:clrMapOvr>
@@ -17488,6 +17174,126 @@
         </p:nvSpPr>
         <p:spPr>
           <a:xfrm>
+            <a:off x="8074152" y="658368"/>
+            <a:ext cx="3566160" cy="384048"/>
+          </a:xfrm>
+          <a:prstGeom prst="roundRect">
+            <a:avLst>
+              <a:gd name="adj" fmla="val 50000"/>
+            </a:avLst>
+          </a:prstGeom>
+          <a:solidFill>
+            <a:srgbClr val="FFFFFF"/>
+          </a:solidFill>
+          <a:ln w="9525">
+            <a:solidFill>
+              <a:srgbClr val="FFC2D8"/>
+            </a:solidFill>
+            <a:prstDash val="solid"/>
+          </a:ln>
+        </p:spPr>
+      </p:sp>
+      <p:pic>
+        <p:nvPicPr>
+          <p:cNvPr id="11" name="Image 0" descr="preencoded.png">    </p:cNvPr>
+          <p:cNvPicPr>
+            <a:picLocks noChangeAspect="1"/>
+          </p:cNvPicPr>
+          <p:nvPr/>
+        </p:nvPicPr>
+        <p:blipFill>
+          <a:blip r:embed="rId1"/>
+          <a:stretch>
+            <a:fillRect/>
+          </a:stretch>
+        </p:blipFill>
+        <p:spPr>
+          <a:xfrm>
+            <a:off x="8220456" y="758952"/>
+            <a:ext cx="182880" cy="182880"/>
+          </a:xfrm>
+          <a:prstGeom prst="rect">
+            <a:avLst/>
+          </a:prstGeom>
+        </p:spPr>
+      </p:pic>
+      <p:sp>
+        <p:nvSpPr>
+          <p:cNvPr id="12" name="Text 9">
+            <a:hlinkClick r:id="rIdundefined" tooltip=""/>
+          </p:cNvPr>
+          <p:cNvSpPr txBox="1"/>
+          <p:nvPr/>
+        </p:nvSpPr>
+        <p:spPr>
+          <a:xfrm>
+            <a:off x="8485632" y="658368"/>
+            <a:ext cx="3017520" cy="384048"/>
+          </a:xfrm>
+          <a:prstGeom prst="rect">
+            <a:avLst/>
+          </a:prstGeom>
+          <a:noFill/>
+          <a:ln/>
+        </p:spPr>
+        <p:txBody>
+          <a:bodyPr wrap="square" lIns="0" tIns="0" rIns="0" bIns="0" rtlCol="0" anchor="ctr"/>
+          <a:lstStyle/>
+          <a:p>
+            <a:pPr indent="0" marL="0">
+              <a:buNone/>
+            </a:pPr>
+            <a:r>
+              <a:rPr lang="en-US" sz="850" b="1" u="sng" dirty="0">
+                <a:solidFill>
+                  <a:srgbClr val="FF2D78"/>
+                </a:solidFill>
+                <a:latin typeface="Pretendard" pitchFamily="34" charset="0"/>
+                <a:ea typeface="Pretendard" pitchFamily="34" charset="-122"/>
+                <a:cs typeface="Pretendard" pitchFamily="34" charset="-120"/>
+                <a:hlinkClick r:id="rIdundefined" invalidUrl="" action="" tgtFrame="" tooltip="" history="1" highlightClick="0" endSnd="0">
+                  <a:extLst>
+                    <a:ext uri="{A12FA001-AC4F-418D-AE19-62706E023703}">
+                      <ahyp:hlinkClr xmlns:ahyp="http://schemas.microsoft.com/office/drawing/2018/hyperlinkcolor" val="tx"/>
+                    </a:ext>
+                  </a:extLst>
+                </a:hlinkClick>
+              </a:rPr>
+              <a:t>데모 바로 보기  </a:t>
+            </a:r>
+            <a:pPr indent="0" marL="0">
+              <a:buNone/>
+            </a:pPr>
+            <a:r>
+              <a:rPr lang="en-US" sz="850" u="sng" dirty="0">
+                <a:solidFill>
+                  <a:srgbClr val="1A1A1E"/>
+                </a:solidFill>
+                <a:latin typeface="Pretendard" pitchFamily="34" charset="0"/>
+                <a:ea typeface="Pretendard" pitchFamily="34" charset="-122"/>
+                <a:cs typeface="Pretendard" pitchFamily="34" charset="-120"/>
+                <a:hlinkClick r:id="rIdundefined" invalidUrl="" action="" tgtFrame="" tooltip="" history="1" highlightClick="0" endSnd="0">
+                  <a:extLst>
+                    <a:ext uri="{A12FA001-AC4F-418D-AE19-62706E023703}">
+                      <ahyp:hlinkClr xmlns:ahyp="http://schemas.microsoft.com/office/drawing/2018/hyperlinkcolor" val="tx"/>
+                    </a:ext>
+                  </a:extLst>
+                </a:hlinkClick>
+              </a:rPr>
+              <a:t>sts-mongben.vercel.app</a:t>
+            </a:r>
+            <a:endParaRPr lang="en-US" sz="850" dirty="0"/>
+          </a:p>
+        </p:txBody>
+      </p:sp>
+      <p:sp>
+        <p:nvSpPr>
+          <p:cNvPr id="13" name="Shape 10"/>
+          <p:cNvSpPr/>
+          <p:nvPr/>
+        </p:nvSpPr>
+        <p:spPr>
+          <a:xfrm>
             <a:off x="548640" y="1691640"/>
             <a:ext cx="1691640" cy="1325880"/>
           </a:xfrm>
@@ -17509,7 +17315,7 @@
       </p:sp>
       <p:sp>
         <p:nvSpPr>
-          <p:cNvPr id="11" name="Text 9"/>
+          <p:cNvPr id="14" name="Text 11"/>
           <p:cNvSpPr txBox="1"/>
           <p:nvPr/>
         </p:nvSpPr>
@@ -17548,14 +17354,14 @@
       </p:sp>
       <p:pic>
         <p:nvPicPr>
-          <p:cNvPr id="12" name="Image 0" descr="preencoded.png">    </p:cNvPr>
+          <p:cNvPr id="15" name="Image 1" descr="preencoded.png">    </p:cNvPr>
           <p:cNvPicPr>
             <a:picLocks noChangeAspect="1"/>
           </p:cNvPicPr>
           <p:nvPr/>
         </p:nvPicPr>
         <p:blipFill>
-          <a:blip r:embed="rId1"/>
+          <a:blip r:embed="rId2"/>
           <a:stretch>
             <a:fillRect/>
           </a:stretch>
@@ -17572,7 +17378,7 @@
       </p:pic>
       <p:sp>
         <p:nvSpPr>
-          <p:cNvPr id="13" name="Text 10"/>
+          <p:cNvPr id="16" name="Text 12"/>
           <p:cNvSpPr txBox="1"/>
           <p:nvPr/>
         </p:nvSpPr>
@@ -17611,7 +17417,7 @@
       </p:sp>
       <p:sp>
         <p:nvSpPr>
-          <p:cNvPr id="14" name="Text 11"/>
+          <p:cNvPr id="17" name="Text 13"/>
           <p:cNvSpPr txBox="1"/>
           <p:nvPr/>
         </p:nvSpPr>
@@ -17653,7 +17459,7 @@
       </p:sp>
       <p:sp>
         <p:nvSpPr>
-          <p:cNvPr id="15" name="Text 12"/>
+          <p:cNvPr id="18" name="Text 14"/>
           <p:cNvSpPr txBox="1"/>
           <p:nvPr/>
         </p:nvSpPr>
@@ -17692,7 +17498,7 @@
       </p:sp>
       <p:sp>
         <p:nvSpPr>
-          <p:cNvPr id="16" name="Shape 13"/>
+          <p:cNvPr id="19" name="Shape 15"/>
           <p:cNvSpPr/>
           <p:nvPr/>
         </p:nvSpPr>
@@ -17719,7 +17525,7 @@
       </p:sp>
       <p:sp>
         <p:nvSpPr>
-          <p:cNvPr id="17" name="Text 14"/>
+          <p:cNvPr id="20" name="Text 16"/>
           <p:cNvSpPr txBox="1"/>
           <p:nvPr/>
         </p:nvSpPr>
@@ -17758,14 +17564,14 @@
       </p:sp>
       <p:pic>
         <p:nvPicPr>
-          <p:cNvPr id="18" name="Image 1" descr="preencoded.png">    </p:cNvPr>
+          <p:cNvPr id="21" name="Image 2" descr="preencoded.png">    </p:cNvPr>
           <p:cNvPicPr>
             <a:picLocks noChangeAspect="1"/>
           </p:cNvPicPr>
           <p:nvPr/>
         </p:nvPicPr>
         <p:blipFill>
-          <a:blip r:embed="rId2"/>
+          <a:blip r:embed="rId3"/>
           <a:stretch>
             <a:fillRect/>
           </a:stretch>
@@ -17782,7 +17588,7 @@
       </p:pic>
       <p:sp>
         <p:nvSpPr>
-          <p:cNvPr id="19" name="Text 15"/>
+          <p:cNvPr id="22" name="Text 17"/>
           <p:cNvSpPr txBox="1"/>
           <p:nvPr/>
         </p:nvSpPr>
@@ -17821,7 +17627,7 @@
       </p:sp>
       <p:sp>
         <p:nvSpPr>
-          <p:cNvPr id="20" name="Text 16"/>
+          <p:cNvPr id="23" name="Text 18"/>
           <p:cNvSpPr txBox="1"/>
           <p:nvPr/>
         </p:nvSpPr>
@@ -17863,7 +17669,7 @@
       </p:sp>
       <p:sp>
         <p:nvSpPr>
-          <p:cNvPr id="21" name="Text 17"/>
+          <p:cNvPr id="24" name="Text 19"/>
           <p:cNvSpPr txBox="1"/>
           <p:nvPr/>
         </p:nvSpPr>
@@ -17902,7 +17708,7 @@
       </p:sp>
       <p:sp>
         <p:nvSpPr>
-          <p:cNvPr id="22" name="Shape 18"/>
+          <p:cNvPr id="25" name="Shape 20"/>
           <p:cNvSpPr/>
           <p:nvPr/>
         </p:nvSpPr>
@@ -17929,7 +17735,7 @@
       </p:sp>
       <p:sp>
         <p:nvSpPr>
-          <p:cNvPr id="23" name="Text 19"/>
+          <p:cNvPr id="26" name="Text 21"/>
           <p:cNvSpPr txBox="1"/>
           <p:nvPr/>
         </p:nvSpPr>
@@ -17968,14 +17774,14 @@
       </p:sp>
       <p:pic>
         <p:nvPicPr>
-          <p:cNvPr id="24" name="Image 2" descr="preencoded.png">    </p:cNvPr>
+          <p:cNvPr id="27" name="Image 3" descr="preencoded.png">    </p:cNvPr>
           <p:cNvPicPr>
             <a:picLocks noChangeAspect="1"/>
           </p:cNvPicPr>
           <p:nvPr/>
         </p:nvPicPr>
         <p:blipFill>
-          <a:blip r:embed="rId3"/>
+          <a:blip r:embed="rId4"/>
           <a:stretch>
             <a:fillRect/>
           </a:stretch>
@@ -17992,7 +17798,7 @@
       </p:pic>
       <p:sp>
         <p:nvSpPr>
-          <p:cNvPr id="25" name="Text 20"/>
+          <p:cNvPr id="28" name="Text 22"/>
           <p:cNvSpPr txBox="1"/>
           <p:nvPr/>
         </p:nvSpPr>
@@ -18031,7 +17837,7 @@
       </p:sp>
       <p:sp>
         <p:nvSpPr>
-          <p:cNvPr id="26" name="Text 21"/>
+          <p:cNvPr id="29" name="Text 23"/>
           <p:cNvSpPr txBox="1"/>
           <p:nvPr/>
         </p:nvSpPr>
@@ -18073,7 +17879,7 @@
       </p:sp>
       <p:sp>
         <p:nvSpPr>
-          <p:cNvPr id="27" name="Text 22"/>
+          <p:cNvPr id="30" name="Text 24"/>
           <p:cNvSpPr txBox="1"/>
           <p:nvPr/>
         </p:nvSpPr>
@@ -18112,7 +17918,7 @@
       </p:sp>
       <p:sp>
         <p:nvSpPr>
-          <p:cNvPr id="28" name="Shape 23"/>
+          <p:cNvPr id="31" name="Shape 25"/>
           <p:cNvSpPr/>
           <p:nvPr/>
         </p:nvSpPr>
@@ -18139,7 +17945,7 @@
       </p:sp>
       <p:sp>
         <p:nvSpPr>
-          <p:cNvPr id="29" name="Text 24"/>
+          <p:cNvPr id="32" name="Text 26"/>
           <p:cNvSpPr txBox="1"/>
           <p:nvPr/>
         </p:nvSpPr>
@@ -18178,14 +17984,14 @@
       </p:sp>
       <p:pic>
         <p:nvPicPr>
-          <p:cNvPr id="30" name="Image 3" descr="preencoded.png">    </p:cNvPr>
+          <p:cNvPr id="33" name="Image 4" descr="preencoded.png">    </p:cNvPr>
           <p:cNvPicPr>
             <a:picLocks noChangeAspect="1"/>
           </p:cNvPicPr>
           <p:nvPr/>
         </p:nvPicPr>
         <p:blipFill>
-          <a:blip r:embed="rId4"/>
+          <a:blip r:embed="rId5"/>
           <a:stretch>
             <a:fillRect/>
           </a:stretch>
@@ -18202,7 +18008,7 @@
       </p:pic>
       <p:sp>
         <p:nvSpPr>
-          <p:cNvPr id="31" name="Text 25"/>
+          <p:cNvPr id="34" name="Text 27"/>
           <p:cNvSpPr txBox="1"/>
           <p:nvPr/>
         </p:nvSpPr>
@@ -18241,7 +18047,7 @@
       </p:sp>
       <p:sp>
         <p:nvSpPr>
-          <p:cNvPr id="32" name="Text 26"/>
+          <p:cNvPr id="35" name="Text 28"/>
           <p:cNvSpPr txBox="1"/>
           <p:nvPr/>
         </p:nvSpPr>
@@ -18283,7 +18089,7 @@
       </p:sp>
       <p:sp>
         <p:nvSpPr>
-          <p:cNvPr id="33" name="Text 27"/>
+          <p:cNvPr id="36" name="Text 29"/>
           <p:cNvSpPr txBox="1"/>
           <p:nvPr/>
         </p:nvSpPr>
@@ -18322,7 +18128,7 @@
       </p:sp>
       <p:sp>
         <p:nvSpPr>
-          <p:cNvPr id="34" name="Shape 28"/>
+          <p:cNvPr id="37" name="Shape 30"/>
           <p:cNvSpPr/>
           <p:nvPr/>
         </p:nvSpPr>
@@ -18349,7 +18155,7 @@
       </p:sp>
       <p:sp>
         <p:nvSpPr>
-          <p:cNvPr id="35" name="Text 29"/>
+          <p:cNvPr id="38" name="Text 31"/>
           <p:cNvSpPr txBox="1"/>
           <p:nvPr/>
         </p:nvSpPr>
@@ -18388,14 +18194,14 @@
       </p:sp>
       <p:pic>
         <p:nvPicPr>
-          <p:cNvPr id="36" name="Image 4" descr="preencoded.png">    </p:cNvPr>
+          <p:cNvPr id="39" name="Image 5" descr="preencoded.png">    </p:cNvPr>
           <p:cNvPicPr>
             <a:picLocks noChangeAspect="1"/>
           </p:cNvPicPr>
           <p:nvPr/>
         </p:nvPicPr>
         <p:blipFill>
-          <a:blip r:embed="rId5"/>
+          <a:blip r:embed="rId6"/>
           <a:stretch>
             <a:fillRect/>
           </a:stretch>
@@ -18412,7 +18218,7 @@
       </p:pic>
       <p:sp>
         <p:nvSpPr>
-          <p:cNvPr id="37" name="Text 30"/>
+          <p:cNvPr id="40" name="Text 32"/>
           <p:cNvSpPr txBox="1"/>
           <p:nvPr/>
         </p:nvSpPr>
@@ -18451,7 +18257,7 @@
       </p:sp>
       <p:sp>
         <p:nvSpPr>
-          <p:cNvPr id="38" name="Text 31"/>
+          <p:cNvPr id="41" name="Text 33"/>
           <p:cNvSpPr txBox="1"/>
           <p:nvPr/>
         </p:nvSpPr>
@@ -18493,7 +18299,7 @@
       </p:sp>
       <p:sp>
         <p:nvSpPr>
-          <p:cNvPr id="39" name="Text 32"/>
+          <p:cNvPr id="42" name="Text 34"/>
           <p:cNvSpPr txBox="1"/>
           <p:nvPr/>
         </p:nvSpPr>
@@ -18532,7 +18338,7 @@
       </p:sp>
       <p:sp>
         <p:nvSpPr>
-          <p:cNvPr id="40" name="Shape 33"/>
+          <p:cNvPr id="43" name="Shape 35"/>
           <p:cNvSpPr/>
           <p:nvPr/>
         </p:nvSpPr>
@@ -18559,7 +18365,7 @@
       </p:sp>
       <p:sp>
         <p:nvSpPr>
-          <p:cNvPr id="41" name="Text 34"/>
+          <p:cNvPr id="44" name="Text 36"/>
           <p:cNvSpPr txBox="1"/>
           <p:nvPr/>
         </p:nvSpPr>
@@ -18598,14 +18404,14 @@
       </p:sp>
       <p:pic>
         <p:nvPicPr>
-          <p:cNvPr id="42" name="Image 5" descr="preencoded.png">    </p:cNvPr>
+          <p:cNvPr id="45" name="Image 6" descr="preencoded.png">    </p:cNvPr>
           <p:cNvPicPr>
             <a:picLocks noChangeAspect="1"/>
           </p:cNvPicPr>
           <p:nvPr/>
         </p:nvPicPr>
         <p:blipFill>
-          <a:blip r:embed="rId6"/>
+          <a:blip r:embed="rId7"/>
           <a:stretch>
             <a:fillRect/>
           </a:stretch>
@@ -18622,7 +18428,7 @@
       </p:pic>
       <p:sp>
         <p:nvSpPr>
-          <p:cNvPr id="43" name="Text 35"/>
+          <p:cNvPr id="46" name="Text 37"/>
           <p:cNvSpPr txBox="1"/>
           <p:nvPr/>
         </p:nvSpPr>
@@ -18661,7 +18467,7 @@
       </p:sp>
       <p:sp>
         <p:nvSpPr>
-          <p:cNvPr id="44" name="Text 36"/>
+          <p:cNvPr id="47" name="Text 38"/>
           <p:cNvSpPr txBox="1"/>
           <p:nvPr/>
         </p:nvSpPr>
@@ -18703,7 +18509,7 @@
       </p:sp>
       <p:sp>
         <p:nvSpPr>
-          <p:cNvPr id="45" name="Shape 37"/>
+          <p:cNvPr id="48" name="Shape 39"/>
           <p:cNvSpPr/>
           <p:nvPr/>
         </p:nvSpPr>
@@ -18730,7 +18536,7 @@
       </p:sp>
       <p:sp>
         <p:nvSpPr>
-          <p:cNvPr id="46" name="Text 38"/>
+          <p:cNvPr id="49" name="Text 40"/>
           <p:cNvSpPr txBox="1"/>
           <p:nvPr/>
         </p:nvSpPr>
@@ -18769,7 +18575,7 @@
       </p:sp>
       <p:sp>
         <p:nvSpPr>
-          <p:cNvPr id="47" name="Text 39"/>
+          <p:cNvPr id="50" name="Text 41"/>
           <p:cNvSpPr txBox="1"/>
           <p:nvPr/>
         </p:nvSpPr>
@@ -18808,31 +18614,7 @@
       </p:sp>
       <p:pic>
         <p:nvPicPr>
-          <p:cNvPr id="48" name="Image 6" descr="img/cmp_bbox.png">    </p:cNvPr>
-          <p:cNvPicPr>
-            <a:picLocks noChangeAspect="1"/>
-          </p:cNvPicPr>
-          <p:nvPr/>
-        </p:nvPicPr>
-        <p:blipFill>
-          <a:blip r:embed="rId7"/>
-          <a:stretch>
-            <a:fillRect/>
-          </a:stretch>
-        </p:blipFill>
-        <p:spPr>
-          <a:xfrm>
-            <a:off x="960120" y="3703320"/>
-            <a:ext cx="1965960" cy="1600200"/>
-          </a:xfrm>
-          <a:prstGeom prst="rect">
-            <a:avLst/>
-          </a:prstGeom>
-        </p:spPr>
-      </p:pic>
-      <p:pic>
-        <p:nvPicPr>
-          <p:cNvPr id="49" name="Image 7" descr="img/cmp_poly.png">    </p:cNvPr>
+          <p:cNvPr id="51" name="Image 7" descr="img/cmp_bbox.png">    </p:cNvPr>
           <p:cNvPicPr>
             <a:picLocks noChangeAspect="1"/>
           </p:cNvPicPr>
@@ -18846,7 +18628,7 @@
         </p:blipFill>
         <p:spPr>
           <a:xfrm>
-            <a:off x="3291840" y="3703320"/>
+            <a:off x="960120" y="3703320"/>
             <a:ext cx="1965960" cy="1600200"/>
           </a:xfrm>
           <a:prstGeom prst="rect">
@@ -18854,126 +18636,9 @@
           </a:prstGeom>
         </p:spPr>
       </p:pic>
-      <p:sp>
-        <p:nvSpPr>
-          <p:cNvPr id="50" name="Text 40"/>
-          <p:cNvSpPr txBox="1"/>
-          <p:nvPr/>
-        </p:nvSpPr>
-        <p:spPr>
-          <a:xfrm>
-            <a:off x="960120" y="5349240"/>
-            <a:ext cx="1965960" cy="201168"/>
-          </a:xfrm>
-          <a:prstGeom prst="rect">
-            <a:avLst/>
-          </a:prstGeom>
-          <a:noFill/>
-          <a:ln/>
-        </p:spPr>
-        <p:txBody>
-          <a:bodyPr wrap="square" lIns="0" tIns="0" rIns="0" bIns="0" rtlCol="0" anchor="t"/>
-          <a:lstStyle/>
-          <a:p>
-            <a:pPr algn="ctr" indent="0" marL="0">
-              <a:buNone/>
-            </a:pPr>
-            <a:r>
-              <a:rPr lang="en-US" sz="750" dirty="0">
-                <a:solidFill>
-                  <a:srgbClr val="7A7A82"/>
-                </a:solidFill>
-                <a:latin typeface="Pretendard" pitchFamily="34" charset="0"/>
-                <a:ea typeface="Pretendard" pitchFamily="34" charset="-122"/>
-                <a:cs typeface="Pretendard" pitchFamily="34" charset="-120"/>
-              </a:rPr>
-              <a:t>정확하지 않은 영역</a:t>
-            </a:r>
-            <a:endParaRPr lang="en-US" sz="750" dirty="0"/>
-          </a:p>
-        </p:txBody>
-      </p:sp>
-      <p:sp>
-        <p:nvSpPr>
-          <p:cNvPr id="51" name="Text 41"/>
-          <p:cNvSpPr txBox="1"/>
-          <p:nvPr/>
-        </p:nvSpPr>
-        <p:spPr>
-          <a:xfrm>
-            <a:off x="3291840" y="5349240"/>
-            <a:ext cx="1965960" cy="201168"/>
-          </a:xfrm>
-          <a:prstGeom prst="rect">
-            <a:avLst/>
-          </a:prstGeom>
-          <a:noFill/>
-          <a:ln/>
-        </p:spPr>
-        <p:txBody>
-          <a:bodyPr wrap="square" lIns="0" tIns="0" rIns="0" bIns="0" rtlCol="0" anchor="t"/>
-          <a:lstStyle/>
-          <a:p>
-            <a:pPr algn="ctr" indent="0" marL="0">
-              <a:buNone/>
-            </a:pPr>
-            <a:r>
-              <a:rPr lang="en-US" sz="750" b="1" dirty="0">
-                <a:solidFill>
-                  <a:srgbClr val="FF2D78"/>
-                </a:solidFill>
-                <a:latin typeface="Pretendard" pitchFamily="34" charset="0"/>
-                <a:ea typeface="Pretendard" pitchFamily="34" charset="-122"/>
-                <a:cs typeface="Pretendard" pitchFamily="34" charset="-120"/>
-              </a:rPr>
-              <a:t>실제 상품 모양을 정확히</a:t>
-            </a:r>
-            <a:endParaRPr lang="en-US" sz="750" dirty="0"/>
-          </a:p>
-        </p:txBody>
-      </p:sp>
-      <p:sp>
-        <p:nvSpPr>
-          <p:cNvPr id="52" name="Text 42"/>
-          <p:cNvSpPr txBox="1"/>
-          <p:nvPr/>
-        </p:nvSpPr>
-        <p:spPr>
-          <a:xfrm>
-            <a:off x="6035040" y="3383280"/>
-            <a:ext cx="5486400" cy="274320"/>
-          </a:xfrm>
-          <a:prstGeom prst="rect">
-            <a:avLst/>
-          </a:prstGeom>
-          <a:noFill/>
-          <a:ln/>
-        </p:spPr>
-        <p:txBody>
-          <a:bodyPr wrap="square" lIns="0" tIns="0" rIns="0" bIns="0" rtlCol="0" anchor="t"/>
-          <a:lstStyle/>
-          <a:p>
-            <a:pPr indent="0" marL="0">
-              <a:buNone/>
-            </a:pPr>
-            <a:r>
-              <a:rPr lang="en-US" sz="1200" b="1" dirty="0">
-                <a:solidFill>
-                  <a:srgbClr val="1A1A1E"/>
-                </a:solidFill>
-                <a:latin typeface="Pretendard" pitchFamily="34" charset="0"/>
-                <a:ea typeface="Pretendard" pitchFamily="34" charset="-122"/>
-                <a:cs typeface="Pretendard" pitchFamily="34" charset="-120"/>
-              </a:rPr>
-              <a:t>STS는 실제 상품의 모양을 정확히 구분합니다</a:t>
-            </a:r>
-            <a:endParaRPr lang="en-US" sz="1200" dirty="0"/>
-          </a:p>
-        </p:txBody>
-      </p:sp>
       <p:pic>
         <p:nvPicPr>
-          <p:cNvPr id="53" name="Image 8" descr="preencoded.png">    </p:cNvPr>
+          <p:cNvPr id="52" name="Image 8" descr="img/cmp_poly.png">    </p:cNvPr>
           <p:cNvPicPr>
             <a:picLocks noChangeAspect="1"/>
           </p:cNvPicPr>
@@ -18987,8 +18652,8 @@
         </p:blipFill>
         <p:spPr>
           <a:xfrm>
-            <a:off x="6035040" y="3794760"/>
-            <a:ext cx="146304" cy="146304"/>
+            <a:off x="3291840" y="3703320"/>
+            <a:ext cx="1965960" cy="1600200"/>
           </a:xfrm>
           <a:prstGeom prst="rect">
             <a:avLst/>
@@ -18997,46 +18662,124 @@
       </p:pic>
       <p:sp>
         <p:nvSpPr>
+          <p:cNvPr id="53" name="Text 42"/>
+          <p:cNvSpPr txBox="1"/>
+          <p:nvPr/>
+        </p:nvSpPr>
+        <p:spPr>
+          <a:xfrm>
+            <a:off x="960120" y="5349240"/>
+            <a:ext cx="1965960" cy="201168"/>
+          </a:xfrm>
+          <a:prstGeom prst="rect">
+            <a:avLst/>
+          </a:prstGeom>
+          <a:noFill/>
+          <a:ln/>
+        </p:spPr>
+        <p:txBody>
+          <a:bodyPr wrap="square" lIns="0" tIns="0" rIns="0" bIns="0" rtlCol="0" anchor="t"/>
+          <a:lstStyle/>
+          <a:p>
+            <a:pPr algn="ctr" indent="0" marL="0">
+              <a:buNone/>
+            </a:pPr>
+            <a:r>
+              <a:rPr lang="en-US" sz="750" dirty="0">
+                <a:solidFill>
+                  <a:srgbClr val="7A7A82"/>
+                </a:solidFill>
+                <a:latin typeface="Pretendard" pitchFamily="34" charset="0"/>
+                <a:ea typeface="Pretendard" pitchFamily="34" charset="-122"/>
+                <a:cs typeface="Pretendard" pitchFamily="34" charset="-120"/>
+              </a:rPr>
+              <a:t>정확하지 않은 영역</a:t>
+            </a:r>
+            <a:endParaRPr lang="en-US" sz="750" dirty="0"/>
+          </a:p>
+        </p:txBody>
+      </p:sp>
+      <p:sp>
+        <p:nvSpPr>
           <p:cNvPr id="54" name="Text 43"/>
           <p:cNvSpPr txBox="1"/>
           <p:nvPr/>
         </p:nvSpPr>
         <p:spPr>
           <a:xfrm>
-            <a:off x="6263640" y="3767328"/>
-            <a:ext cx="5376672" cy="365760"/>
-          </a:xfrm>
-          <a:prstGeom prst="rect">
-            <a:avLst/>
-          </a:prstGeom>
-          <a:noFill/>
-          <a:ln/>
-        </p:spPr>
-        <p:txBody>
-          <a:bodyPr wrap="square" lIns="0" tIns="0" rIns="0" bIns="0" rtlCol="0" anchor="t"/>
-          <a:lstStyle/>
-          <a:p>
-            <a:pPr indent="0" marL="0">
-              <a:buNone/>
-            </a:pPr>
-            <a:r>
-              <a:rPr lang="en-US" sz="900" dirty="0">
-                <a:solidFill>
-                  <a:srgbClr val="3A3A42"/>
-                </a:solidFill>
-                <a:latin typeface="Pretendard" pitchFamily="34" charset="0"/>
-                <a:ea typeface="Pretendard" pitchFamily="34" charset="-122"/>
-                <a:cs typeface="Pretendard" pitchFamily="34" charset="-120"/>
-              </a:rPr>
-              <a:t>네모 박스가 아닌, 실제 상품의 실루엣(모양)을 따라 영역을 구분합니다.</a:t>
-            </a:r>
-            <a:endParaRPr lang="en-US" sz="900" dirty="0"/>
+            <a:off x="3291840" y="5349240"/>
+            <a:ext cx="1965960" cy="201168"/>
+          </a:xfrm>
+          <a:prstGeom prst="rect">
+            <a:avLst/>
+          </a:prstGeom>
+          <a:noFill/>
+          <a:ln/>
+        </p:spPr>
+        <p:txBody>
+          <a:bodyPr wrap="square" lIns="0" tIns="0" rIns="0" bIns="0" rtlCol="0" anchor="t"/>
+          <a:lstStyle/>
+          <a:p>
+            <a:pPr algn="ctr" indent="0" marL="0">
+              <a:buNone/>
+            </a:pPr>
+            <a:r>
+              <a:rPr lang="en-US" sz="750" b="1" dirty="0">
+                <a:solidFill>
+                  <a:srgbClr val="FF2D78"/>
+                </a:solidFill>
+                <a:latin typeface="Pretendard" pitchFamily="34" charset="0"/>
+                <a:ea typeface="Pretendard" pitchFamily="34" charset="-122"/>
+                <a:cs typeface="Pretendard" pitchFamily="34" charset="-120"/>
+              </a:rPr>
+              <a:t>실제 상품 모양을 정확히</a:t>
+            </a:r>
+            <a:endParaRPr lang="en-US" sz="750" dirty="0"/>
+          </a:p>
+        </p:txBody>
+      </p:sp>
+      <p:sp>
+        <p:nvSpPr>
+          <p:cNvPr id="55" name="Text 44"/>
+          <p:cNvSpPr txBox="1"/>
+          <p:nvPr/>
+        </p:nvSpPr>
+        <p:spPr>
+          <a:xfrm>
+            <a:off x="6035040" y="3383280"/>
+            <a:ext cx="5486400" cy="274320"/>
+          </a:xfrm>
+          <a:prstGeom prst="rect">
+            <a:avLst/>
+          </a:prstGeom>
+          <a:noFill/>
+          <a:ln/>
+        </p:spPr>
+        <p:txBody>
+          <a:bodyPr wrap="square" lIns="0" tIns="0" rIns="0" bIns="0" rtlCol="0" anchor="t"/>
+          <a:lstStyle/>
+          <a:p>
+            <a:pPr indent="0" marL="0">
+              <a:buNone/>
+            </a:pPr>
+            <a:r>
+              <a:rPr lang="en-US" sz="1200" b="1" dirty="0">
+                <a:solidFill>
+                  <a:srgbClr val="1A1A1E"/>
+                </a:solidFill>
+                <a:latin typeface="Pretendard" pitchFamily="34" charset="0"/>
+                <a:ea typeface="Pretendard" pitchFamily="34" charset="-122"/>
+                <a:cs typeface="Pretendard" pitchFamily="34" charset="-120"/>
+              </a:rPr>
+              <a:t>STS는 실제 상품의 모양을 정확히 구분합니다</a:t>
+            </a:r>
+            <a:endParaRPr lang="en-US" sz="1200" dirty="0"/>
           </a:p>
         </p:txBody>
       </p:sp>
       <p:pic>
         <p:nvPicPr>
-          <p:cNvPr id="55" name="Image 9" descr="preencoded.png">    </p:cNvPr>
+          <p:cNvPr id="56" name="Image 9" descr="preencoded.png">    </p:cNvPr>
           <p:cNvPicPr>
             <a:picLocks noChangeAspect="1"/>
           </p:cNvPicPr>
@@ -19050,7 +18793,7 @@
         </p:blipFill>
         <p:spPr>
           <a:xfrm>
-            <a:off x="6035040" y="4160520"/>
+            <a:off x="6035040" y="3794760"/>
             <a:ext cx="146304" cy="146304"/>
           </a:xfrm>
           <a:prstGeom prst="rect">
@@ -19060,13 +18803,13 @@
       </p:pic>
       <p:sp>
         <p:nvSpPr>
-          <p:cNvPr id="56" name="Text 44"/>
-          <p:cNvSpPr txBox="1"/>
-          <p:nvPr/>
-        </p:nvSpPr>
-        <p:spPr>
-          <a:xfrm>
-            <a:off x="6263640" y="4133088"/>
+          <p:cNvPr id="57" name="Text 45"/>
+          <p:cNvSpPr txBox="1"/>
+          <p:nvPr/>
+        </p:nvSpPr>
+        <p:spPr>
+          <a:xfrm>
+            <a:off x="6263640" y="3767328"/>
             <a:ext cx="5376672" cy="365760"/>
           </a:xfrm>
           <a:prstGeom prst="rect">
@@ -19091,7 +18834,7 @@
                 <a:ea typeface="Pretendard" pitchFamily="34" charset="-122"/>
                 <a:cs typeface="Pretendard" pitchFamily="34" charset="-120"/>
               </a:rPr>
-              <a:t>더 정확한 매칭으로 원하는 상품을 빠르게 찾을 수 있습니다.</a:t>
+              <a:t>네모 박스가 아닌, 실제 상품의 실루엣(모양)을 따라 영역을 구분합니다.</a:t>
             </a:r>
             <a:endParaRPr lang="en-US" sz="900" dirty="0"/>
           </a:p>
@@ -19099,7 +18842,7 @@
       </p:sp>
       <p:pic>
         <p:nvPicPr>
-          <p:cNvPr id="57" name="Image 10" descr="preencoded.png">    </p:cNvPr>
+          <p:cNvPr id="58" name="Image 10" descr="preencoded.png">    </p:cNvPr>
           <p:cNvPicPr>
             <a:picLocks noChangeAspect="1"/>
           </p:cNvPicPr>
@@ -19113,6 +18856,69 @@
         </p:blipFill>
         <p:spPr>
           <a:xfrm>
+            <a:off x="6035040" y="4160520"/>
+            <a:ext cx="146304" cy="146304"/>
+          </a:xfrm>
+          <a:prstGeom prst="rect">
+            <a:avLst/>
+          </a:prstGeom>
+        </p:spPr>
+      </p:pic>
+      <p:sp>
+        <p:nvSpPr>
+          <p:cNvPr id="59" name="Text 46"/>
+          <p:cNvSpPr txBox="1"/>
+          <p:nvPr/>
+        </p:nvSpPr>
+        <p:spPr>
+          <a:xfrm>
+            <a:off x="6263640" y="4133088"/>
+            <a:ext cx="5376672" cy="365760"/>
+          </a:xfrm>
+          <a:prstGeom prst="rect">
+            <a:avLst/>
+          </a:prstGeom>
+          <a:noFill/>
+          <a:ln/>
+        </p:spPr>
+        <p:txBody>
+          <a:bodyPr wrap="square" lIns="0" tIns="0" rIns="0" bIns="0" rtlCol="0" anchor="t"/>
+          <a:lstStyle/>
+          <a:p>
+            <a:pPr indent="0" marL="0">
+              <a:buNone/>
+            </a:pPr>
+            <a:r>
+              <a:rPr lang="en-US" sz="900" dirty="0">
+                <a:solidFill>
+                  <a:srgbClr val="3A3A42"/>
+                </a:solidFill>
+                <a:latin typeface="Pretendard" pitchFamily="34" charset="0"/>
+                <a:ea typeface="Pretendard" pitchFamily="34" charset="-122"/>
+                <a:cs typeface="Pretendard" pitchFamily="34" charset="-120"/>
+              </a:rPr>
+              <a:t>더 정확한 매칭으로 원하는 상품을 빠르게 찾을 수 있습니다.</a:t>
+            </a:r>
+            <a:endParaRPr lang="en-US" sz="900" dirty="0"/>
+          </a:p>
+        </p:txBody>
+      </p:sp>
+      <p:pic>
+        <p:nvPicPr>
+          <p:cNvPr id="60" name="Image 11" descr="preencoded.png">    </p:cNvPr>
+          <p:cNvPicPr>
+            <a:picLocks noChangeAspect="1"/>
+          </p:cNvPicPr>
+          <p:nvPr/>
+        </p:nvPicPr>
+        <p:blipFill>
+          <a:blip r:embed="rId12"/>
+          <a:stretch>
+            <a:fillRect/>
+          </a:stretch>
+        </p:blipFill>
+        <p:spPr>
+          <a:xfrm>
             <a:off x="6035040" y="4526280"/>
             <a:ext cx="146304" cy="146304"/>
           </a:xfrm>
@@ -19123,7 +18929,7 @@
       </p:pic>
       <p:sp>
         <p:nvSpPr>
-          <p:cNvPr id="58" name="Text 45"/>
+          <p:cNvPr id="61" name="Text 47"/>
           <p:cNvSpPr txBox="1"/>
           <p:nvPr/>
         </p:nvSpPr>
@@ -19162,7 +18968,7 @@
       </p:sp>
       <p:sp>
         <p:nvSpPr>
-          <p:cNvPr id="59" name="Shape 46"/>
+          <p:cNvPr id="62" name="Shape 48"/>
           <p:cNvSpPr/>
           <p:nvPr/>
         </p:nvSpPr>
@@ -19189,7 +18995,7 @@
       </p:sp>
       <p:sp>
         <p:nvSpPr>
-          <p:cNvPr id="60" name="Text 47"/>
+          <p:cNvPr id="63" name="Text 49"/>
           <p:cNvSpPr txBox="1"/>
           <p:nvPr/>
         </p:nvSpPr>
@@ -19228,7 +19034,7 @@
       </p:sp>
       <p:sp>
         <p:nvSpPr>
-          <p:cNvPr id="61" name="Text 48"/>
+          <p:cNvPr id="64" name="Text 50"/>
           <p:cNvSpPr txBox="1"/>
           <p:nvPr/>
         </p:nvSpPr>
@@ -19267,7 +19073,7 @@
       </p:sp>
       <p:sp>
         <p:nvSpPr>
-          <p:cNvPr id="62" name="Shape 49"/>
+          <p:cNvPr id="65" name="Shape 51"/>
           <p:cNvSpPr/>
           <p:nvPr/>
         </p:nvSpPr>
@@ -19294,7 +19100,7 @@
       </p:sp>
       <p:sp>
         <p:nvSpPr>
-          <p:cNvPr id="63" name="Text 50"/>
+          <p:cNvPr id="66" name="Text 52"/>
           <p:cNvSpPr txBox="1"/>
           <p:nvPr/>
         </p:nvSpPr>
@@ -19333,7 +19139,7 @@
       </p:sp>
       <p:sp>
         <p:nvSpPr>
-          <p:cNvPr id="64" name="Shape 51"/>
+          <p:cNvPr id="67" name="Shape 53"/>
           <p:cNvSpPr/>
           <p:nvPr/>
         </p:nvSpPr>
@@ -19357,7 +19163,7 @@
       </p:sp>
       <p:sp>
         <p:nvSpPr>
-          <p:cNvPr id="65" name="Text 52"/>
+          <p:cNvPr id="68" name="Text 54"/>
           <p:cNvSpPr txBox="1"/>
           <p:nvPr/>
         </p:nvSpPr>
@@ -19396,7 +19202,7 @@
       </p:sp>
       <p:sp>
         <p:nvSpPr>
-          <p:cNvPr id="66" name="Text 53"/>
+          <p:cNvPr id="69" name="Text 55"/>
           <p:cNvSpPr txBox="1"/>
           <p:nvPr/>
         </p:nvSpPr>
@@ -19435,7 +19241,7 @@
       </p:sp>
       <p:sp>
         <p:nvSpPr>
-          <p:cNvPr id="67" name="Text 54"/>
+          <p:cNvPr id="70" name="Text 56"/>
           <p:cNvSpPr txBox="1"/>
           <p:nvPr/>
         </p:nvSpPr>
@@ -19477,7 +19283,7 @@
       </p:sp>
       <p:sp>
         <p:nvSpPr>
-          <p:cNvPr id="68" name="Shape 55"/>
+          <p:cNvPr id="71" name="Shape 57"/>
           <p:cNvSpPr/>
           <p:nvPr/>
         </p:nvSpPr>
@@ -19504,7 +19310,7 @@
       </p:sp>
       <p:sp>
         <p:nvSpPr>
-          <p:cNvPr id="69" name="Shape 56"/>
+          <p:cNvPr id="72" name="Shape 58"/>
           <p:cNvSpPr/>
           <p:nvPr/>
         </p:nvSpPr>
@@ -19529,14 +19335,14 @@
       </p:sp>
       <p:pic>
         <p:nvPicPr>
-          <p:cNvPr id="70" name="Image 11" descr="preencoded.png">    </p:cNvPr>
+          <p:cNvPr id="73" name="Image 12" descr="preencoded.png">    </p:cNvPr>
           <p:cNvPicPr>
             <a:picLocks noChangeAspect="1"/>
           </p:cNvPicPr>
           <p:nvPr/>
         </p:nvPicPr>
         <p:blipFill>
-          <a:blip r:embed="rId12"/>
+          <a:blip r:embed="rId13"/>
           <a:stretch>
             <a:fillRect/>
           </a:stretch>
@@ -19553,7 +19359,7 @@
       </p:pic>
       <p:sp>
         <p:nvSpPr>
-          <p:cNvPr id="71" name="Text 57"/>
+          <p:cNvPr id="74" name="Text 59"/>
           <p:cNvSpPr txBox="1"/>
           <p:nvPr/>
         </p:nvSpPr>
